--- a/public/fun/pack/pptx/birthday/돌잔치_31_성장기록중심_은행잎길.pptx
+++ b/public/fun/pack/pptx/birthday/돌잔치_31_성장기록중심_은행잎길.pptx
@@ -3286,6 +3286,14 @@
 <file path=ppt/slides/slide1.xml><?xml version="1.0" encoding="utf-8"?>
 <p:sld xmlns:a="http://schemas.openxmlformats.org/drawingml/2006/main" xmlns:p="http://schemas.openxmlformats.org/presentationml/2006/main" xmlns:r="http://schemas.openxmlformats.org/officeDocument/2006/relationships">
   <p:cSld>
+    <p:bg>
+      <p:bgPr>
+        <a:solidFill>
+          <a:srgbClr val="FBF8EC"/>
+        </a:solidFill>
+        <a:effectLst/>
+      </p:bgPr>
+    </p:bg>
     <p:spTree>
       <p:nvGrpSpPr>
         <p:cNvPr id="1" name=""/>
@@ -3293,30 +3301,116 @@
         <p:nvPr/>
       </p:nvGrpSpPr>
       <p:grpSpPr/>
-      <p:pic>
-        <p:nvPicPr>
-          <p:cNvPr id="3" name="표지 그림" descr="birthday-31.jpg"/>
-          <p:cNvPicPr>
-            <a:picLocks noChangeAspect="1"/>
-          </p:cNvPicPr>
+      <p:sp>
+        <p:nvSpPr>
+          <p:cNvPr id="3" name="사진 자리"/>
+          <p:cNvSpPr/>
           <p:nvPr/>
-        </p:nvPicPr>
-        <p:blipFill>
-          <a:blip r:embed="rId2"/>
-          <a:stretch>
-            <a:fillRect/>
-          </a:stretch>
-        </p:blipFill>
+        </p:nvSpPr>
         <p:spPr>
           <a:xfrm>
             <a:off x="0" y="0"/>
-            <a:ext cx="12191695" cy="6858000"/>
+            <a:ext cx="4389010" cy="6858000"/>
           </a:xfrm>
           <a:prstGeom prst="rect">
             <a:avLst/>
           </a:prstGeom>
-        </p:spPr>
-      </p:pic>
+          <a:solidFill>
+            <a:srgbClr val="EBDEAD"/>
+          </a:solidFill>
+          <a:ln>
+            <a:noFill/>
+          </a:ln>
+        </p:spPr>
+        <p:txBody>
+          <a:bodyPr rtlCol="0" anchor="ctr" wrap="square" lIns="54864" rIns="54864" tIns="27432" bIns="27432">
+            <a:noAutofit/>
+          </a:bodyPr>
+          <a:lstStyle/>
+          <a:p>
+            <a:pPr algn="ctr">
+              <a:lnSpc>
+                <a:spcPct val="100000"/>
+              </a:lnSpc>
+            </a:pPr>
+            <a:r>
+              <a:rPr sz="1400" b="0" i="0">
+                <a:solidFill>
+                  <a:srgbClr val="494227"/>
+                </a:solidFill>
+              </a:rPr>
+              <a:t>사진을 넣어 주세요</a:t>
+            </a:r>
+          </a:p>
+        </p:txBody>
+      </p:sp>
+      <p:sp>
+        <p:nvSpPr>
+          <p:cNvPr id="4" name="장식"/>
+          <p:cNvSpPr/>
+          <p:nvPr/>
+        </p:nvSpPr>
+        <p:spPr>
+          <a:xfrm>
+            <a:off x="365750" y="365760"/>
+            <a:ext cx="3657508" cy="6126480"/>
+          </a:xfrm>
+          <a:prstGeom prst="rect">
+            <a:avLst/>
+          </a:prstGeom>
+          <a:noFill/>
+          <a:ln w="9525">
+            <a:solidFill>
+              <a:srgbClr val="26231F"/>
+            </a:solidFill>
+          </a:ln>
+        </p:spPr>
+        <p:txBody>
+          <a:bodyPr rtlCol="0" anchor="ctr"/>
+          <a:lstStyle/>
+          <a:p>
+            <a:pPr algn="ctr"/>
+          </a:p>
+        </p:txBody>
+      </p:sp>
+      <p:sp>
+        <p:nvSpPr>
+          <p:cNvPr id="5" name="라벨"/>
+          <p:cNvSpPr txBox="1"/>
+          <p:nvPr/>
+        </p:nvSpPr>
+        <p:spPr>
+          <a:xfrm>
+            <a:off x="6827349" y="2148840"/>
+            <a:ext cx="4632844" cy="274320"/>
+          </a:xfrm>
+          <a:prstGeom prst="rect">
+            <a:avLst/>
+          </a:prstGeom>
+          <a:noFill/>
+        </p:spPr>
+        <p:txBody>
+          <a:bodyPr wrap="square" lIns="54864" rIns="54864" tIns="27432" bIns="27432" anchor="t">
+            <a:noAutofit/>
+          </a:bodyPr>
+          <a:lstStyle/>
+          <a:p>
+            <a:pPr algn="l">
+              <a:lnSpc>
+                <a:spcPct val="115000"/>
+              </a:lnSpc>
+            </a:pPr>
+            <a:r>
+              <a:rPr sz="1000" b="1" i="0" spc="250">
+                <a:solidFill>
+                  <a:srgbClr val="26231F"/>
+                </a:solidFill>
+              </a:rPr>
+              <a:t>FIRST BIRTHDAY</a:t>
+            </a:r>
+          </a:p>
+        </p:txBody>
+      </p:sp>
       <p:sp>
         <p:nvSpPr>
           <p:cNvPr id="2" name="Title 1"/>
@@ -3329,8 +3423,8 @@
         </p:nvSpPr>
         <p:spPr>
           <a:xfrm>
-            <a:off x="853418" y="2057400"/>
-            <a:ext cx="6095847" cy="1554480"/>
+            <a:off x="6827349" y="2606040"/>
+            <a:ext cx="4632844" cy="1188720"/>
           </a:xfrm>
         </p:spPr>
         <p:txBody>
@@ -3347,7 +3441,7 @@
             <a:r>
               <a:rPr sz="4000" b="1" i="0">
                 <a:solidFill>
-                  <a:srgbClr val="756110"/>
+                  <a:srgbClr val="26231F"/>
                 </a:solidFill>
               </a:rPr>
               <a:t>첫 번째 생일</a:t>
@@ -3357,14 +3451,14 @@
       </p:sp>
       <p:sp>
         <p:nvSpPr>
-          <p:cNvPr id="4" name="한 줄 문구"/>
+          <p:cNvPr id="6" name="한 줄 문구"/>
           <p:cNvSpPr txBox="1"/>
           <p:nvPr/>
         </p:nvSpPr>
         <p:spPr>
           <a:xfrm>
-            <a:off x="853418" y="3749039"/>
-            <a:ext cx="6095847" cy="822960"/>
+            <a:off x="6827349" y="3886200"/>
+            <a:ext cx="4632844" cy="822960"/>
           </a:xfrm>
           <a:prstGeom prst="rect">
             <a:avLst/>
@@ -3383,9 +3477,9 @@
               </a:lnSpc>
             </a:pPr>
             <a:r>
-              <a:rPr sz="1700" b="0" i="1">
+              <a:rPr sz="1700" b="0" i="0">
                 <a:solidFill>
-                  <a:srgbClr val="756110"/>
+                  <a:srgbClr val="26231F"/>
                 </a:solidFill>
               </a:rPr>
               <a:t>이유식 먹던 날이 엊그제 같습니다</a:t>
@@ -3395,14 +3489,14 @@
       </p:sp>
       <p:sp>
         <p:nvSpPr>
-          <p:cNvPr id="5" name="안내 문구"/>
+          <p:cNvPr id="7" name="안내 문구"/>
           <p:cNvSpPr txBox="1"/>
           <p:nvPr/>
         </p:nvSpPr>
         <p:spPr>
           <a:xfrm>
-            <a:off x="853418" y="4617720"/>
-            <a:ext cx="6095847" cy="914400"/>
+            <a:off x="6827349" y="4754880"/>
+            <a:ext cx="4632844" cy="914400"/>
           </a:xfrm>
           <a:prstGeom prst="rect">
             <a:avLst/>
@@ -3423,10 +3517,10 @@
             <a:r>
               <a:rPr sz="1400" b="0" i="0">
                 <a:solidFill>
-                  <a:srgbClr val="666666"/>
+                  <a:srgbClr val="26231F"/>
                 </a:solidFill>
               </a:rPr>
-              <a:t>아기 이름 · 2027. 00. 00</a:t>
+              <a:t>아기 이름 · 날짜 입력</a:t>
             </a:r>
           </a:p>
           <a:p>
@@ -3438,7 +3532,7 @@
             <a:r>
               <a:rPr sz="1400" b="0" i="0">
                 <a:solidFill>
-                  <a:srgbClr val="666666"/>
+                  <a:srgbClr val="26231F"/>
                 </a:solidFill>
               </a:rPr>
               <a:t>장소를 입력하세요</a:t>
@@ -3460,7 +3554,7 @@
     <p:bg>
       <p:bgPr>
         <a:solidFill>
-          <a:srgbClr val="CEAB1C"/>
+          <a:srgbClr val="F6EFD5"/>
         </a:solidFill>
         <a:effectLst/>
       </p:bgPr>
@@ -3474,22 +3568,20 @@
       <p:grpSpPr/>
       <p:sp>
         <p:nvSpPr>
-          <p:cNvPr id="3" name="장식"/>
+          <p:cNvPr id="3" name="포인트"/>
           <p:cNvSpPr/>
           <p:nvPr/>
         </p:nvSpPr>
         <p:spPr>
           <a:xfrm>
-            <a:off x="274320" y="274320"/>
-            <a:ext cx="11643055" cy="6309360"/>
-          </a:xfrm>
-          <a:prstGeom prst="roundRect">
-            <a:avLst>
-              <a:gd name="adj" fmla="val 3500"/>
-            </a:avLst>
+            <a:off x="5958687" y="246888"/>
+            <a:ext cx="274320" cy="274320"/>
+          </a:xfrm>
+          <a:prstGeom prst="ellipse">
+            <a:avLst/>
           </a:prstGeom>
           <a:solidFill>
-            <a:srgbClr val="FFFFFF"/>
+            <a:srgbClr val="D8C579"/>
           </a:solidFill>
           <a:ln>
             <a:noFill/>
@@ -3500,6 +3592,73 @@
           <a:lstStyle/>
           <a:p>
             <a:pPr algn="ctr"/>
+          </a:p>
+        </p:txBody>
+      </p:sp>
+      <p:sp>
+        <p:nvSpPr>
+          <p:cNvPr id="4" name="장식"/>
+          <p:cNvSpPr/>
+          <p:nvPr/>
+        </p:nvSpPr>
+        <p:spPr>
+          <a:xfrm>
+            <a:off x="5684367" y="1572768"/>
+            <a:ext cx="822960" cy="22860"/>
+          </a:xfrm>
+          <a:prstGeom prst="rect">
+            <a:avLst/>
+          </a:prstGeom>
+          <a:solidFill>
+            <a:srgbClr val="D8C579"/>
+          </a:solidFill>
+          <a:ln>
+            <a:noFill/>
+          </a:ln>
+        </p:spPr>
+        <p:txBody>
+          <a:bodyPr rtlCol="0" anchor="ctr"/>
+          <a:lstStyle/>
+          <a:p>
+            <a:pPr algn="ctr"/>
+          </a:p>
+        </p:txBody>
+      </p:sp>
+      <p:sp>
+        <p:nvSpPr>
+          <p:cNvPr id="5" name="상단 라벨"/>
+          <p:cNvSpPr txBox="1"/>
+          <p:nvPr/>
+        </p:nvSpPr>
+        <p:spPr>
+          <a:xfrm>
+            <a:off x="640080" y="182880"/>
+            <a:ext cx="3657600" cy="274320"/>
+          </a:xfrm>
+          <a:prstGeom prst="rect">
+            <a:avLst/>
+          </a:prstGeom>
+          <a:noFill/>
+        </p:spPr>
+        <p:txBody>
+          <a:bodyPr wrap="square" lIns="54864" rIns="54864" tIns="27432" bIns="27432" anchor="ctr">
+            <a:noAutofit/>
+          </a:bodyPr>
+          <a:lstStyle/>
+          <a:p>
+            <a:pPr algn="l">
+              <a:lnSpc>
+                <a:spcPct val="115000"/>
+              </a:lnSpc>
+            </a:pPr>
+            <a:r>
+              <a:rPr sz="800" b="1" i="0" spc="250">
+                <a:solidFill>
+                  <a:srgbClr val="8E8780"/>
+                </a:solidFill>
+              </a:rPr>
+              <a:t>FIRST BIRTHDAY</a:t>
+            </a:r>
           </a:p>
         </p:txBody>
       </p:sp>
@@ -3515,7 +3674,7 @@
         </p:nvSpPr>
         <p:spPr>
           <a:xfrm>
-            <a:off x="731520" y="548640"/>
+            <a:off x="1371600" y="640080"/>
             <a:ext cx="9448495" cy="868680"/>
           </a:xfrm>
         </p:spPr>
@@ -3525,7 +3684,7 @@
           </a:bodyPr>
           <a:lstStyle/>
           <a:p>
-            <a:pPr algn="l">
+            <a:pPr algn="ctr">
               <a:lnSpc>
                 <a:spcPct val="105000"/>
               </a:lnSpc>
@@ -3533,7 +3692,7 @@
             <a:r>
               <a:rPr sz="3000" b="1" i="0">
                 <a:solidFill>
-                  <a:srgbClr val="756110"/>
+                  <a:srgbClr val="26231F"/>
                 </a:solidFill>
               </a:rPr>
               <a:t>우리 아기를 소개합니다</a:t>
@@ -3543,14 +3702,14 @@
       </p:sp>
       <p:sp>
         <p:nvSpPr>
-          <p:cNvPr id="4" name="사진 자리"/>
+          <p:cNvPr id="6" name="사진 자리"/>
           <p:cNvSpPr/>
           <p:nvPr/>
         </p:nvSpPr>
         <p:spPr>
           <a:xfrm>
-            <a:off x="731520" y="1600200"/>
-            <a:ext cx="3840480" cy="4434840"/>
+            <a:off x="640080" y="1783080"/>
+            <a:ext cx="3840480" cy="4389120"/>
           </a:xfrm>
           <a:prstGeom prst="roundRect">
             <a:avLst>
@@ -3558,12 +3717,10 @@
             </a:avLst>
           </a:prstGeom>
           <a:solidFill>
-            <a:srgbClr val="F9EFC8"/>
+            <a:srgbClr val="F6EFD5"/>
           </a:solidFill>
           <a:ln w="19050">
-            <a:solidFill>
-              <a:srgbClr val="CEAB1C"/>
-            </a:solidFill>
+            <a:noFill/>
             <a:prstDash val="dash"/>
           </a:ln>
         </p:spPr>
@@ -3581,7 +3738,7 @@
             <a:r>
               <a:rPr sz="1400" b="0" i="0">
                 <a:solidFill>
-                  <a:srgbClr val="756110"/>
+                  <a:srgbClr val="8E8780"/>
                 </a:solidFill>
               </a:rPr>
               <a:t>아기 사진을 넣어 주세요</a:t>
@@ -3591,15 +3748,15 @@
       </p:sp>
       <p:graphicFrame>
         <p:nvGraphicFramePr>
-          <p:cNvPr id="5" name="표"/>
+          <p:cNvPr id="7" name="표"/>
           <p:cNvGraphicFramePr>
             <a:graphicFrameLocks noGrp="1"/>
           </p:cNvGraphicFramePr>
           <p:nvPr/>
         </p:nvGraphicFramePr>
         <p:xfrm>
-          <a:off x="4937759" y="1600200"/>
-          <a:ext cx="6522415" cy="3950208"/>
+          <a:off x="4846320" y="1783080"/>
+          <a:ext cx="6705295" cy="3950208"/>
         </p:xfrm>
         <a:graphic>
           <a:graphicData uri="http://schemas.openxmlformats.org/drawingml/2006/table">
@@ -3609,7 +3766,7 @@
               </a:tblPr>
               <a:tblGrid>
                 <a:gridCol w="1828800"/>
-                <a:gridCol w="4693615"/>
+                <a:gridCol w="4876495"/>
               </a:tblGrid>
               <a:tr h="658368">
                 <a:tc>
@@ -3621,7 +3778,7 @@
                       <a:r>
                         <a:rPr sz="1500" b="1">
                           <a:solidFill>
-                            <a:srgbClr val="756110"/>
+                            <a:srgbClr val="494227"/>
                           </a:solidFill>
                         </a:rPr>
                         <a:t>이름</a:t>
@@ -3631,30 +3788,30 @@
                   <a:tcPr anchor="ctr" marL="73152" marR="73152">
                     <a:lnL w="9525" cap="flat" cmpd="sng" algn="ctr">
                       <a:solidFill>
-                        <a:srgbClr val="F9EFC8"/>
+                        <a:srgbClr val="F6EFD5"/>
                       </a:solidFill>
                       <a:prstDash val="solid"/>
                     </a:lnL>
                     <a:lnR w="9525" cap="flat" cmpd="sng" algn="ctr">
                       <a:solidFill>
-                        <a:srgbClr val="F9EFC8"/>
+                        <a:srgbClr val="F6EFD5"/>
                       </a:solidFill>
                       <a:prstDash val="solid"/>
                     </a:lnR>
                     <a:lnT w="9525" cap="flat" cmpd="sng" algn="ctr">
                       <a:solidFill>
-                        <a:srgbClr val="F9EFC8"/>
+                        <a:srgbClr val="F6EFD5"/>
                       </a:solidFill>
                       <a:prstDash val="solid"/>
                     </a:lnT>
                     <a:lnB w="9525" cap="flat" cmpd="sng" algn="ctr">
                       <a:solidFill>
-                        <a:srgbClr val="F9EFC8"/>
+                        <a:srgbClr val="F6EFD5"/>
                       </a:solidFill>
                       <a:prstDash val="solid"/>
                     </a:lnB>
                     <a:solidFill>
-                      <a:srgbClr val="F9EFC8"/>
+                      <a:srgbClr val="F6EFD5"/>
                     </a:solidFill>
                   </a:tcPr>
                 </a:tc>
@@ -3667,7 +3824,7 @@
                       <a:r>
                         <a:rPr sz="1500" b="0">
                           <a:solidFill>
-                            <a:srgbClr val="2B2B2B"/>
+                            <a:srgbClr val="26231F"/>
                           </a:solidFill>
                         </a:rPr>
                         <a:t>입력하세요</a:t>
@@ -3677,30 +3834,30 @@
                   <a:tcPr anchor="ctr" marL="73152" marR="73152">
                     <a:lnL w="9525" cap="flat" cmpd="sng" algn="ctr">
                       <a:solidFill>
-                        <a:srgbClr val="F9EFC8"/>
+                        <a:srgbClr val="F6EFD5"/>
                       </a:solidFill>
                       <a:prstDash val="solid"/>
                     </a:lnL>
                     <a:lnR w="9525" cap="flat" cmpd="sng" algn="ctr">
                       <a:solidFill>
-                        <a:srgbClr val="F9EFC8"/>
+                        <a:srgbClr val="F6EFD5"/>
                       </a:solidFill>
                       <a:prstDash val="solid"/>
                     </a:lnR>
                     <a:lnT w="9525" cap="flat" cmpd="sng" algn="ctr">
                       <a:solidFill>
-                        <a:srgbClr val="F9EFC8"/>
+                        <a:srgbClr val="F6EFD5"/>
                       </a:solidFill>
                       <a:prstDash val="solid"/>
                     </a:lnT>
                     <a:lnB w="9525" cap="flat" cmpd="sng" algn="ctr">
                       <a:solidFill>
-                        <a:srgbClr val="F9EFC8"/>
+                        <a:srgbClr val="F6EFD5"/>
                       </a:solidFill>
                       <a:prstDash val="solid"/>
                     </a:lnB>
                     <a:solidFill>
-                      <a:srgbClr val="FDF9ED"/>
+                      <a:srgbClr val="FBF8EC"/>
                     </a:solidFill>
                   </a:tcPr>
                 </a:tc>
@@ -3715,7 +3872,7 @@
                       <a:r>
                         <a:rPr sz="1500" b="1">
                           <a:solidFill>
-                            <a:srgbClr val="756110"/>
+                            <a:srgbClr val="494227"/>
                           </a:solidFill>
                         </a:rPr>
                         <a:t>생일</a:t>
@@ -3725,30 +3882,30 @@
                   <a:tcPr anchor="ctr" marL="73152" marR="73152">
                     <a:lnL w="9525" cap="flat" cmpd="sng" algn="ctr">
                       <a:solidFill>
-                        <a:srgbClr val="F9EFC8"/>
+                        <a:srgbClr val="F6EFD5"/>
                       </a:solidFill>
                       <a:prstDash val="solid"/>
                     </a:lnL>
                     <a:lnR w="9525" cap="flat" cmpd="sng" algn="ctr">
                       <a:solidFill>
-                        <a:srgbClr val="F9EFC8"/>
+                        <a:srgbClr val="F6EFD5"/>
                       </a:solidFill>
                       <a:prstDash val="solid"/>
                     </a:lnR>
                     <a:lnT w="9525" cap="flat" cmpd="sng" algn="ctr">
                       <a:solidFill>
-                        <a:srgbClr val="F9EFC8"/>
+                        <a:srgbClr val="F6EFD5"/>
                       </a:solidFill>
                       <a:prstDash val="solid"/>
                     </a:lnT>
                     <a:lnB w="9525" cap="flat" cmpd="sng" algn="ctr">
                       <a:solidFill>
-                        <a:srgbClr val="F9EFC8"/>
+                        <a:srgbClr val="F6EFD5"/>
                       </a:solidFill>
                       <a:prstDash val="solid"/>
                     </a:lnB>
                     <a:solidFill>
-                      <a:srgbClr val="F9EFC8"/>
+                      <a:srgbClr val="F6EFD5"/>
                     </a:solidFill>
                   </a:tcPr>
                 </a:tc>
@@ -3761,7 +3918,7 @@
                       <a:r>
                         <a:rPr sz="1500" b="0">
                           <a:solidFill>
-                            <a:srgbClr val="2B2B2B"/>
+                            <a:srgbClr val="26231F"/>
                           </a:solidFill>
                         </a:rPr>
                         <a:t>입력하세요</a:t>
@@ -3771,25 +3928,25 @@
                   <a:tcPr anchor="ctr" marL="73152" marR="73152">
                     <a:lnL w="9525" cap="flat" cmpd="sng" algn="ctr">
                       <a:solidFill>
-                        <a:srgbClr val="F9EFC8"/>
+                        <a:srgbClr val="F6EFD5"/>
                       </a:solidFill>
                       <a:prstDash val="solid"/>
                     </a:lnL>
                     <a:lnR w="9525" cap="flat" cmpd="sng" algn="ctr">
                       <a:solidFill>
-                        <a:srgbClr val="F9EFC8"/>
+                        <a:srgbClr val="F6EFD5"/>
                       </a:solidFill>
                       <a:prstDash val="solid"/>
                     </a:lnR>
                     <a:lnT w="9525" cap="flat" cmpd="sng" algn="ctr">
                       <a:solidFill>
-                        <a:srgbClr val="F9EFC8"/>
+                        <a:srgbClr val="F6EFD5"/>
                       </a:solidFill>
                       <a:prstDash val="solid"/>
                     </a:lnT>
                     <a:lnB w="9525" cap="flat" cmpd="sng" algn="ctr">
                       <a:solidFill>
-                        <a:srgbClr val="F9EFC8"/>
+                        <a:srgbClr val="F6EFD5"/>
                       </a:solidFill>
                       <a:prstDash val="solid"/>
                     </a:lnB>
@@ -3809,7 +3966,7 @@
                       <a:r>
                         <a:rPr sz="1500" b="1">
                           <a:solidFill>
-                            <a:srgbClr val="756110"/>
+                            <a:srgbClr val="494227"/>
                           </a:solidFill>
                         </a:rPr>
                         <a:t>키 · 몸무게</a:t>
@@ -3819,30 +3976,30 @@
                   <a:tcPr anchor="ctr" marL="73152" marR="73152">
                     <a:lnL w="9525" cap="flat" cmpd="sng" algn="ctr">
                       <a:solidFill>
-                        <a:srgbClr val="F9EFC8"/>
+                        <a:srgbClr val="F6EFD5"/>
                       </a:solidFill>
                       <a:prstDash val="solid"/>
                     </a:lnL>
                     <a:lnR w="9525" cap="flat" cmpd="sng" algn="ctr">
                       <a:solidFill>
-                        <a:srgbClr val="F9EFC8"/>
+                        <a:srgbClr val="F6EFD5"/>
                       </a:solidFill>
                       <a:prstDash val="solid"/>
                     </a:lnR>
                     <a:lnT w="9525" cap="flat" cmpd="sng" algn="ctr">
                       <a:solidFill>
-                        <a:srgbClr val="F9EFC8"/>
+                        <a:srgbClr val="F6EFD5"/>
                       </a:solidFill>
                       <a:prstDash val="solid"/>
                     </a:lnT>
                     <a:lnB w="9525" cap="flat" cmpd="sng" algn="ctr">
                       <a:solidFill>
-                        <a:srgbClr val="F9EFC8"/>
+                        <a:srgbClr val="F6EFD5"/>
                       </a:solidFill>
                       <a:prstDash val="solid"/>
                     </a:lnB>
                     <a:solidFill>
-                      <a:srgbClr val="F9EFC8"/>
+                      <a:srgbClr val="F6EFD5"/>
                     </a:solidFill>
                   </a:tcPr>
                 </a:tc>
@@ -3855,7 +4012,7 @@
                       <a:r>
                         <a:rPr sz="1500" b="0">
                           <a:solidFill>
-                            <a:srgbClr val="2B2B2B"/>
+                            <a:srgbClr val="26231F"/>
                           </a:solidFill>
                         </a:rPr>
                         <a:t>입력하세요</a:t>
@@ -3865,30 +4022,30 @@
                   <a:tcPr anchor="ctr" marL="73152" marR="73152">
                     <a:lnL w="9525" cap="flat" cmpd="sng" algn="ctr">
                       <a:solidFill>
-                        <a:srgbClr val="F9EFC8"/>
+                        <a:srgbClr val="F6EFD5"/>
                       </a:solidFill>
                       <a:prstDash val="solid"/>
                     </a:lnL>
                     <a:lnR w="9525" cap="flat" cmpd="sng" algn="ctr">
                       <a:solidFill>
-                        <a:srgbClr val="F9EFC8"/>
+                        <a:srgbClr val="F6EFD5"/>
                       </a:solidFill>
                       <a:prstDash val="solid"/>
                     </a:lnR>
                     <a:lnT w="9525" cap="flat" cmpd="sng" algn="ctr">
                       <a:solidFill>
-                        <a:srgbClr val="F9EFC8"/>
+                        <a:srgbClr val="F6EFD5"/>
                       </a:solidFill>
                       <a:prstDash val="solid"/>
                     </a:lnT>
                     <a:lnB w="9525" cap="flat" cmpd="sng" algn="ctr">
                       <a:solidFill>
-                        <a:srgbClr val="F9EFC8"/>
+                        <a:srgbClr val="F6EFD5"/>
                       </a:solidFill>
                       <a:prstDash val="solid"/>
                     </a:lnB>
                     <a:solidFill>
-                      <a:srgbClr val="FDF9ED"/>
+                      <a:srgbClr val="FBF8EC"/>
                     </a:solidFill>
                   </a:tcPr>
                 </a:tc>
@@ -3903,7 +4060,7 @@
                       <a:r>
                         <a:rPr sz="1500" b="1">
                           <a:solidFill>
-                            <a:srgbClr val="756110"/>
+                            <a:srgbClr val="494227"/>
                           </a:solidFill>
                         </a:rPr>
                         <a:t>좋아하는 것</a:t>
@@ -3913,30 +4070,30 @@
                   <a:tcPr anchor="ctr" marL="73152" marR="73152">
                     <a:lnL w="9525" cap="flat" cmpd="sng" algn="ctr">
                       <a:solidFill>
-                        <a:srgbClr val="F9EFC8"/>
+                        <a:srgbClr val="F6EFD5"/>
                       </a:solidFill>
                       <a:prstDash val="solid"/>
                     </a:lnL>
                     <a:lnR w="9525" cap="flat" cmpd="sng" algn="ctr">
                       <a:solidFill>
-                        <a:srgbClr val="F9EFC8"/>
+                        <a:srgbClr val="F6EFD5"/>
                       </a:solidFill>
                       <a:prstDash val="solid"/>
                     </a:lnR>
                     <a:lnT w="9525" cap="flat" cmpd="sng" algn="ctr">
                       <a:solidFill>
-                        <a:srgbClr val="F9EFC8"/>
+                        <a:srgbClr val="F6EFD5"/>
                       </a:solidFill>
                       <a:prstDash val="solid"/>
                     </a:lnT>
                     <a:lnB w="9525" cap="flat" cmpd="sng" algn="ctr">
                       <a:solidFill>
-                        <a:srgbClr val="F9EFC8"/>
+                        <a:srgbClr val="F6EFD5"/>
                       </a:solidFill>
                       <a:prstDash val="solid"/>
                     </a:lnB>
                     <a:solidFill>
-                      <a:srgbClr val="F9EFC8"/>
+                      <a:srgbClr val="F6EFD5"/>
                     </a:solidFill>
                   </a:tcPr>
                 </a:tc>
@@ -3949,7 +4106,7 @@
                       <a:r>
                         <a:rPr sz="1500" b="0">
                           <a:solidFill>
-                            <a:srgbClr val="2B2B2B"/>
+                            <a:srgbClr val="26231F"/>
                           </a:solidFill>
                         </a:rPr>
                         <a:t>입력하세요</a:t>
@@ -3959,25 +4116,25 @@
                   <a:tcPr anchor="ctr" marL="73152" marR="73152">
                     <a:lnL w="9525" cap="flat" cmpd="sng" algn="ctr">
                       <a:solidFill>
-                        <a:srgbClr val="F9EFC8"/>
+                        <a:srgbClr val="F6EFD5"/>
                       </a:solidFill>
                       <a:prstDash val="solid"/>
                     </a:lnL>
                     <a:lnR w="9525" cap="flat" cmpd="sng" algn="ctr">
                       <a:solidFill>
-                        <a:srgbClr val="F9EFC8"/>
+                        <a:srgbClr val="F6EFD5"/>
                       </a:solidFill>
                       <a:prstDash val="solid"/>
                     </a:lnR>
                     <a:lnT w="9525" cap="flat" cmpd="sng" algn="ctr">
                       <a:solidFill>
-                        <a:srgbClr val="F9EFC8"/>
+                        <a:srgbClr val="F6EFD5"/>
                       </a:solidFill>
                       <a:prstDash val="solid"/>
                     </a:lnT>
                     <a:lnB w="9525" cap="flat" cmpd="sng" algn="ctr">
                       <a:solidFill>
-                        <a:srgbClr val="F9EFC8"/>
+                        <a:srgbClr val="F6EFD5"/>
                       </a:solidFill>
                       <a:prstDash val="solid"/>
                     </a:lnB>
@@ -3997,7 +4154,7 @@
                       <a:r>
                         <a:rPr sz="1500" b="1">
                           <a:solidFill>
-                            <a:srgbClr val="756110"/>
+                            <a:srgbClr val="494227"/>
                           </a:solidFill>
                         </a:rPr>
                         <a:t>별명</a:t>
@@ -4007,30 +4164,30 @@
                   <a:tcPr anchor="ctr" marL="73152" marR="73152">
                     <a:lnL w="9525" cap="flat" cmpd="sng" algn="ctr">
                       <a:solidFill>
-                        <a:srgbClr val="F9EFC8"/>
+                        <a:srgbClr val="F6EFD5"/>
                       </a:solidFill>
                       <a:prstDash val="solid"/>
                     </a:lnL>
                     <a:lnR w="9525" cap="flat" cmpd="sng" algn="ctr">
                       <a:solidFill>
-                        <a:srgbClr val="F9EFC8"/>
+                        <a:srgbClr val="F6EFD5"/>
                       </a:solidFill>
                       <a:prstDash val="solid"/>
                     </a:lnR>
                     <a:lnT w="9525" cap="flat" cmpd="sng" algn="ctr">
                       <a:solidFill>
-                        <a:srgbClr val="F9EFC8"/>
+                        <a:srgbClr val="F6EFD5"/>
                       </a:solidFill>
                       <a:prstDash val="solid"/>
                     </a:lnT>
                     <a:lnB w="9525" cap="flat" cmpd="sng" algn="ctr">
                       <a:solidFill>
-                        <a:srgbClr val="F9EFC8"/>
+                        <a:srgbClr val="F6EFD5"/>
                       </a:solidFill>
                       <a:prstDash val="solid"/>
                     </a:lnB>
                     <a:solidFill>
-                      <a:srgbClr val="F9EFC8"/>
+                      <a:srgbClr val="F6EFD5"/>
                     </a:solidFill>
                   </a:tcPr>
                 </a:tc>
@@ -4043,7 +4200,7 @@
                       <a:r>
                         <a:rPr sz="1500" b="0">
                           <a:solidFill>
-                            <a:srgbClr val="2B2B2B"/>
+                            <a:srgbClr val="26231F"/>
                           </a:solidFill>
                         </a:rPr>
                         <a:t>입력하세요</a:t>
@@ -4053,30 +4210,30 @@
                   <a:tcPr anchor="ctr" marL="73152" marR="73152">
                     <a:lnL w="9525" cap="flat" cmpd="sng" algn="ctr">
                       <a:solidFill>
-                        <a:srgbClr val="F9EFC8"/>
+                        <a:srgbClr val="F6EFD5"/>
                       </a:solidFill>
                       <a:prstDash val="solid"/>
                     </a:lnL>
                     <a:lnR w="9525" cap="flat" cmpd="sng" algn="ctr">
                       <a:solidFill>
-                        <a:srgbClr val="F9EFC8"/>
+                        <a:srgbClr val="F6EFD5"/>
                       </a:solidFill>
                       <a:prstDash val="solid"/>
                     </a:lnR>
                     <a:lnT w="9525" cap="flat" cmpd="sng" algn="ctr">
                       <a:solidFill>
-                        <a:srgbClr val="F9EFC8"/>
+                        <a:srgbClr val="F6EFD5"/>
                       </a:solidFill>
                       <a:prstDash val="solid"/>
                     </a:lnT>
                     <a:lnB w="9525" cap="flat" cmpd="sng" algn="ctr">
                       <a:solidFill>
-                        <a:srgbClr val="F9EFC8"/>
+                        <a:srgbClr val="F6EFD5"/>
                       </a:solidFill>
                       <a:prstDash val="solid"/>
                     </a:lnB>
                     <a:solidFill>
-                      <a:srgbClr val="FDF9ED"/>
+                      <a:srgbClr val="FBF8EC"/>
                     </a:solidFill>
                   </a:tcPr>
                 </a:tc>
@@ -4091,7 +4248,7 @@
                       <a:r>
                         <a:rPr sz="1500" b="1">
                           <a:solidFill>
-                            <a:srgbClr val="756110"/>
+                            <a:srgbClr val="494227"/>
                           </a:solidFill>
                         </a:rPr>
                         <a:t>부모의 마음</a:t>
@@ -4101,30 +4258,30 @@
                   <a:tcPr anchor="ctr" marL="73152" marR="73152">
                     <a:lnL w="9525" cap="flat" cmpd="sng" algn="ctr">
                       <a:solidFill>
-                        <a:srgbClr val="F9EFC8"/>
+                        <a:srgbClr val="F6EFD5"/>
                       </a:solidFill>
                       <a:prstDash val="solid"/>
                     </a:lnL>
                     <a:lnR w="9525" cap="flat" cmpd="sng" algn="ctr">
                       <a:solidFill>
-                        <a:srgbClr val="F9EFC8"/>
+                        <a:srgbClr val="F6EFD5"/>
                       </a:solidFill>
                       <a:prstDash val="solid"/>
                     </a:lnR>
                     <a:lnT w="9525" cap="flat" cmpd="sng" algn="ctr">
                       <a:solidFill>
-                        <a:srgbClr val="F9EFC8"/>
+                        <a:srgbClr val="F6EFD5"/>
                       </a:solidFill>
                       <a:prstDash val="solid"/>
                     </a:lnT>
                     <a:lnB w="9525" cap="flat" cmpd="sng" algn="ctr">
                       <a:solidFill>
-                        <a:srgbClr val="F9EFC8"/>
+                        <a:srgbClr val="F6EFD5"/>
                       </a:solidFill>
                       <a:prstDash val="solid"/>
                     </a:lnB>
                     <a:solidFill>
-                      <a:srgbClr val="F9EFC8"/>
+                      <a:srgbClr val="F6EFD5"/>
                     </a:solidFill>
                   </a:tcPr>
                 </a:tc>
@@ -4137,7 +4294,7 @@
                       <a:r>
                         <a:rPr sz="1500" b="0">
                           <a:solidFill>
-                            <a:srgbClr val="2B2B2B"/>
+                            <a:srgbClr val="26231F"/>
                           </a:solidFill>
                         </a:rPr>
                         <a:t>입력하세요</a:t>
@@ -4147,25 +4304,25 @@
                   <a:tcPr anchor="ctr" marL="73152" marR="73152">
                     <a:lnL w="9525" cap="flat" cmpd="sng" algn="ctr">
                       <a:solidFill>
-                        <a:srgbClr val="F9EFC8"/>
+                        <a:srgbClr val="F6EFD5"/>
                       </a:solidFill>
                       <a:prstDash val="solid"/>
                     </a:lnL>
                     <a:lnR w="9525" cap="flat" cmpd="sng" algn="ctr">
                       <a:solidFill>
-                        <a:srgbClr val="F9EFC8"/>
+                        <a:srgbClr val="F6EFD5"/>
                       </a:solidFill>
                       <a:prstDash val="solid"/>
                     </a:lnR>
                     <a:lnT w="9525" cap="flat" cmpd="sng" algn="ctr">
                       <a:solidFill>
-                        <a:srgbClr val="F9EFC8"/>
+                        <a:srgbClr val="F6EFD5"/>
                       </a:solidFill>
                       <a:prstDash val="solid"/>
                     </a:lnT>
                     <a:lnB w="9525" cap="flat" cmpd="sng" algn="ctr">
                       <a:solidFill>
-                        <a:srgbClr val="F9EFC8"/>
+                        <a:srgbClr val="F6EFD5"/>
                       </a:solidFill>
                       <a:prstDash val="solid"/>
                     </a:lnB>
@@ -4193,7 +4350,7 @@
     <p:bg>
       <p:bgPr>
         <a:solidFill>
-          <a:srgbClr val="CEAB1C"/>
+          <a:srgbClr val="F6EFD5"/>
         </a:solidFill>
         <a:effectLst/>
       </p:bgPr>
@@ -4207,22 +4364,20 @@
       <p:grpSpPr/>
       <p:sp>
         <p:nvSpPr>
-          <p:cNvPr id="3" name="장식"/>
+          <p:cNvPr id="3" name="포인트"/>
           <p:cNvSpPr/>
           <p:nvPr/>
         </p:nvSpPr>
         <p:spPr>
           <a:xfrm>
-            <a:off x="274320" y="274320"/>
-            <a:ext cx="11643055" cy="6309360"/>
-          </a:xfrm>
-          <a:prstGeom prst="roundRect">
-            <a:avLst>
-              <a:gd name="adj" fmla="val 3500"/>
-            </a:avLst>
+            <a:off x="5958687" y="246888"/>
+            <a:ext cx="274320" cy="274320"/>
+          </a:xfrm>
+          <a:prstGeom prst="ellipse">
+            <a:avLst/>
           </a:prstGeom>
           <a:solidFill>
-            <a:srgbClr val="FFFFFF"/>
+            <a:srgbClr val="D8C579"/>
           </a:solidFill>
           <a:ln>
             <a:noFill/>
@@ -4233,6 +4388,73 @@
           <a:lstStyle/>
           <a:p>
             <a:pPr algn="ctr"/>
+          </a:p>
+        </p:txBody>
+      </p:sp>
+      <p:sp>
+        <p:nvSpPr>
+          <p:cNvPr id="4" name="장식"/>
+          <p:cNvSpPr/>
+          <p:nvPr/>
+        </p:nvSpPr>
+        <p:spPr>
+          <a:xfrm>
+            <a:off x="5684367" y="1572768"/>
+            <a:ext cx="822960" cy="22860"/>
+          </a:xfrm>
+          <a:prstGeom prst="rect">
+            <a:avLst/>
+          </a:prstGeom>
+          <a:solidFill>
+            <a:srgbClr val="D8C579"/>
+          </a:solidFill>
+          <a:ln>
+            <a:noFill/>
+          </a:ln>
+        </p:spPr>
+        <p:txBody>
+          <a:bodyPr rtlCol="0" anchor="ctr"/>
+          <a:lstStyle/>
+          <a:p>
+            <a:pPr algn="ctr"/>
+          </a:p>
+        </p:txBody>
+      </p:sp>
+      <p:sp>
+        <p:nvSpPr>
+          <p:cNvPr id="5" name="상단 라벨"/>
+          <p:cNvSpPr txBox="1"/>
+          <p:nvPr/>
+        </p:nvSpPr>
+        <p:spPr>
+          <a:xfrm>
+            <a:off x="640080" y="182880"/>
+            <a:ext cx="3657600" cy="274320"/>
+          </a:xfrm>
+          <a:prstGeom prst="rect">
+            <a:avLst/>
+          </a:prstGeom>
+          <a:noFill/>
+        </p:spPr>
+        <p:txBody>
+          <a:bodyPr wrap="square" lIns="54864" rIns="54864" tIns="27432" bIns="27432" anchor="ctr">
+            <a:noAutofit/>
+          </a:bodyPr>
+          <a:lstStyle/>
+          <a:p>
+            <a:pPr algn="l">
+              <a:lnSpc>
+                <a:spcPct val="115000"/>
+              </a:lnSpc>
+            </a:pPr>
+            <a:r>
+              <a:rPr sz="800" b="1" i="0" spc="250">
+                <a:solidFill>
+                  <a:srgbClr val="8E8780"/>
+                </a:solidFill>
+              </a:rPr>
+              <a:t>FIRST BIRTHDAY</a:t>
+            </a:r>
           </a:p>
         </p:txBody>
       </p:sp>
@@ -4248,7 +4470,7 @@
         </p:nvSpPr>
         <p:spPr>
           <a:xfrm>
-            <a:off x="731520" y="548640"/>
+            <a:off x="1371600" y="640080"/>
             <a:ext cx="9448495" cy="868680"/>
           </a:xfrm>
         </p:spPr>
@@ -4258,7 +4480,7 @@
           </a:bodyPr>
           <a:lstStyle/>
           <a:p>
-            <a:pPr algn="l">
+            <a:pPr algn="ctr">
               <a:lnSpc>
                 <a:spcPct val="105000"/>
               </a:lnSpc>
@@ -4266,7 +4488,7 @@
             <a:r>
               <a:rPr sz="3000" b="1" i="0">
                 <a:solidFill>
-                  <a:srgbClr val="756110"/>
+                  <a:srgbClr val="26231F"/>
                 </a:solidFill>
               </a:rPr>
               <a:t>한 해 성장 기록</a:t>
@@ -4276,20 +4498,20 @@
       </p:sp>
       <p:sp>
         <p:nvSpPr>
-          <p:cNvPr id="4" name="타임라인 선"/>
+          <p:cNvPr id="6" name="타임라인 선"/>
           <p:cNvSpPr/>
           <p:nvPr/>
         </p:nvSpPr>
         <p:spPr>
           <a:xfrm>
-            <a:off x="731520" y="3337560"/>
-            <a:ext cx="10728655" cy="54864"/>
+            <a:off x="640080" y="3520440"/>
+            <a:ext cx="10911535" cy="54864"/>
           </a:xfrm>
           <a:prstGeom prst="rect">
             <a:avLst/>
           </a:prstGeom>
           <a:solidFill>
-            <a:srgbClr val="F9EFC8"/>
+            <a:srgbClr val="F6EFD5"/>
           </a:solidFill>
           <a:ln>
             <a:noFill/>
@@ -4305,20 +4527,20 @@
       </p:sp>
       <p:sp>
         <p:nvSpPr>
-          <p:cNvPr id="5" name="때 1"/>
+          <p:cNvPr id="7" name="때 1"/>
           <p:cNvSpPr/>
           <p:nvPr/>
         </p:nvSpPr>
         <p:spPr>
           <a:xfrm>
-            <a:off x="1603217" y="3154680"/>
+            <a:off x="1530065" y="3337560"/>
             <a:ext cx="402336" cy="402336"/>
           </a:xfrm>
           <a:prstGeom prst="ellipse">
             <a:avLst/>
           </a:prstGeom>
           <a:solidFill>
-            <a:srgbClr val="CEAB1C"/>
+            <a:srgbClr val="D8C579"/>
           </a:solidFill>
           <a:ln w="38100">
             <a:solidFill>
@@ -4336,14 +4558,14 @@
       </p:sp>
       <p:sp>
         <p:nvSpPr>
-          <p:cNvPr id="6" name="TextBox 5"/>
+          <p:cNvPr id="8" name="TextBox 7"/>
           <p:cNvSpPr txBox="1"/>
           <p:nvPr/>
         </p:nvSpPr>
         <p:spPr>
           <a:xfrm>
-            <a:off x="777240" y="2514600"/>
-            <a:ext cx="2054291" cy="457200"/>
+            <a:off x="685800" y="2697480"/>
+            <a:ext cx="2090867" cy="457200"/>
           </a:xfrm>
           <a:prstGeom prst="rect">
             <a:avLst/>
@@ -4364,7 +4586,7 @@
             <a:r>
               <a:rPr sz="1400" b="1" i="0">
                 <a:solidFill>
-                  <a:srgbClr val="CEAB1C"/>
+                  <a:srgbClr val="D8C579"/>
                 </a:solidFill>
               </a:rPr>
               <a:t>1개월</a:t>
@@ -4374,14 +4596,14 @@
       </p:sp>
       <p:sp>
         <p:nvSpPr>
-          <p:cNvPr id="7" name="TextBox 6"/>
+          <p:cNvPr id="9" name="TextBox 8"/>
           <p:cNvSpPr txBox="1"/>
           <p:nvPr/>
         </p:nvSpPr>
         <p:spPr>
           <a:xfrm>
-            <a:off x="822960" y="3703320"/>
-            <a:ext cx="1962851" cy="457200"/>
+            <a:off x="731519" y="3886200"/>
+            <a:ext cx="1999427" cy="457200"/>
           </a:xfrm>
           <a:prstGeom prst="rect">
             <a:avLst/>
@@ -4402,7 +4624,7 @@
             <a:r>
               <a:rPr sz="1600" b="1" i="0">
                 <a:solidFill>
-                  <a:srgbClr val="756110"/>
+                  <a:srgbClr val="494227"/>
                 </a:solidFill>
               </a:rPr>
               <a:t>처음 눈을 맞춘 날</a:t>
@@ -4412,14 +4634,14 @@
       </p:sp>
       <p:sp>
         <p:nvSpPr>
-          <p:cNvPr id="8" name="TextBox 7"/>
+          <p:cNvPr id="10" name="TextBox 9"/>
           <p:cNvSpPr txBox="1"/>
           <p:nvPr/>
         </p:nvSpPr>
         <p:spPr>
           <a:xfrm>
-            <a:off x="822960" y="4206240"/>
-            <a:ext cx="1962851" cy="1645920"/>
+            <a:off x="731519" y="4389120"/>
+            <a:ext cx="1999427" cy="1645920"/>
           </a:xfrm>
           <a:prstGeom prst="rect">
             <a:avLst/>
@@ -4440,7 +4662,7 @@
             <a:r>
               <a:rPr sz="1300" b="0" i="0">
                 <a:solidFill>
-                  <a:srgbClr val="2B2B2B"/>
+                  <a:srgbClr val="26231F"/>
                 </a:solidFill>
               </a:rPr>
               <a:t>기억을 적어 주세요</a:t>
@@ -4450,20 +4672,20 @@
       </p:sp>
       <p:sp>
         <p:nvSpPr>
-          <p:cNvPr id="9" name="때 2"/>
+          <p:cNvPr id="11" name="때 2"/>
           <p:cNvSpPr/>
           <p:nvPr/>
         </p:nvSpPr>
         <p:spPr>
           <a:xfrm>
-            <a:off x="3748948" y="3154680"/>
+            <a:off x="3712372" y="3337560"/>
             <a:ext cx="402336" cy="402336"/>
           </a:xfrm>
           <a:prstGeom prst="ellipse">
             <a:avLst/>
           </a:prstGeom>
           <a:solidFill>
-            <a:srgbClr val="CEAB1C"/>
+            <a:srgbClr val="D8C579"/>
           </a:solidFill>
           <a:ln w="38100">
             <a:solidFill>
@@ -4481,14 +4703,14 @@
       </p:sp>
       <p:sp>
         <p:nvSpPr>
-          <p:cNvPr id="10" name="TextBox 9"/>
+          <p:cNvPr id="12" name="TextBox 11"/>
           <p:cNvSpPr txBox="1"/>
           <p:nvPr/>
         </p:nvSpPr>
         <p:spPr>
           <a:xfrm>
-            <a:off x="2922971" y="2514600"/>
-            <a:ext cx="2054291" cy="457200"/>
+            <a:off x="2868107" y="2697480"/>
+            <a:ext cx="2090867" cy="457200"/>
           </a:xfrm>
           <a:prstGeom prst="rect">
             <a:avLst/>
@@ -4509,7 +4731,7 @@
             <a:r>
               <a:rPr sz="1400" b="1" i="0">
                 <a:solidFill>
-                  <a:srgbClr val="CEAB1C"/>
+                  <a:srgbClr val="D8C579"/>
                 </a:solidFill>
               </a:rPr>
               <a:t>3개월</a:t>
@@ -4519,14 +4741,14 @@
       </p:sp>
       <p:sp>
         <p:nvSpPr>
-          <p:cNvPr id="11" name="TextBox 10"/>
+          <p:cNvPr id="13" name="TextBox 12"/>
           <p:cNvSpPr txBox="1"/>
           <p:nvPr/>
         </p:nvSpPr>
         <p:spPr>
           <a:xfrm>
-            <a:off x="2968691" y="3703320"/>
-            <a:ext cx="1962851" cy="457200"/>
+            <a:off x="2913827" y="3886200"/>
+            <a:ext cx="1999427" cy="457200"/>
           </a:xfrm>
           <a:prstGeom prst="rect">
             <a:avLst/>
@@ -4547,7 +4769,7 @@
             <a:r>
               <a:rPr sz="1600" b="1" i="0">
                 <a:solidFill>
-                  <a:srgbClr val="756110"/>
+                  <a:srgbClr val="494227"/>
                 </a:solidFill>
               </a:rPr>
               <a:t>처음 웃은 날</a:t>
@@ -4557,14 +4779,14 @@
       </p:sp>
       <p:sp>
         <p:nvSpPr>
-          <p:cNvPr id="12" name="TextBox 11"/>
+          <p:cNvPr id="14" name="TextBox 13"/>
           <p:cNvSpPr txBox="1"/>
           <p:nvPr/>
         </p:nvSpPr>
         <p:spPr>
           <a:xfrm>
-            <a:off x="2968691" y="4206240"/>
-            <a:ext cx="1962851" cy="1645920"/>
+            <a:off x="2913827" y="4389120"/>
+            <a:ext cx="1999427" cy="1645920"/>
           </a:xfrm>
           <a:prstGeom prst="rect">
             <a:avLst/>
@@ -4585,7 +4807,7 @@
             <a:r>
               <a:rPr sz="1300" b="0" i="0">
                 <a:solidFill>
-                  <a:srgbClr val="2B2B2B"/>
+                  <a:srgbClr val="26231F"/>
                 </a:solidFill>
               </a:rPr>
               <a:t>기억을 적어 주세요</a:t>
@@ -4595,20 +4817,20 @@
       </p:sp>
       <p:sp>
         <p:nvSpPr>
-          <p:cNvPr id="13" name="때 3"/>
+          <p:cNvPr id="15" name="때 3"/>
           <p:cNvSpPr/>
           <p:nvPr/>
         </p:nvSpPr>
         <p:spPr>
           <a:xfrm>
-            <a:off x="5894679" y="3154680"/>
+            <a:off x="5894679" y="3337560"/>
             <a:ext cx="402336" cy="402336"/>
           </a:xfrm>
           <a:prstGeom prst="ellipse">
             <a:avLst/>
           </a:prstGeom>
           <a:solidFill>
-            <a:srgbClr val="CEAB1C"/>
+            <a:srgbClr val="D8C579"/>
           </a:solidFill>
           <a:ln w="38100">
             <a:solidFill>
@@ -4626,14 +4848,14 @@
       </p:sp>
       <p:sp>
         <p:nvSpPr>
-          <p:cNvPr id="14" name="TextBox 13"/>
+          <p:cNvPr id="16" name="TextBox 15"/>
           <p:cNvSpPr txBox="1"/>
           <p:nvPr/>
         </p:nvSpPr>
         <p:spPr>
           <a:xfrm>
-            <a:off x="5068702" y="2514600"/>
-            <a:ext cx="2054291" cy="457200"/>
+            <a:off x="5050414" y="2697480"/>
+            <a:ext cx="2090867" cy="457200"/>
           </a:xfrm>
           <a:prstGeom prst="rect">
             <a:avLst/>
@@ -4654,7 +4876,7 @@
             <a:r>
               <a:rPr sz="1400" b="1" i="0">
                 <a:solidFill>
-                  <a:srgbClr val="CEAB1C"/>
+                  <a:srgbClr val="D8C579"/>
                 </a:solidFill>
               </a:rPr>
               <a:t>6개월</a:t>
@@ -4664,14 +4886,14 @@
       </p:sp>
       <p:sp>
         <p:nvSpPr>
-          <p:cNvPr id="15" name="TextBox 14"/>
+          <p:cNvPr id="17" name="TextBox 16"/>
           <p:cNvSpPr txBox="1"/>
           <p:nvPr/>
         </p:nvSpPr>
         <p:spPr>
           <a:xfrm>
-            <a:off x="5114422" y="3703320"/>
-            <a:ext cx="1962851" cy="457200"/>
+            <a:off x="5096134" y="3886200"/>
+            <a:ext cx="1999427" cy="457200"/>
           </a:xfrm>
           <a:prstGeom prst="rect">
             <a:avLst/>
@@ -4692,7 +4914,7 @@
             <a:r>
               <a:rPr sz="1600" b="1" i="0">
                 <a:solidFill>
-                  <a:srgbClr val="756110"/>
+                  <a:srgbClr val="494227"/>
                 </a:solidFill>
               </a:rPr>
               <a:t>뒤집기 성공</a:t>
@@ -4702,14 +4924,14 @@
       </p:sp>
       <p:sp>
         <p:nvSpPr>
-          <p:cNvPr id="16" name="TextBox 15"/>
+          <p:cNvPr id="18" name="TextBox 17"/>
           <p:cNvSpPr txBox="1"/>
           <p:nvPr/>
         </p:nvSpPr>
         <p:spPr>
           <a:xfrm>
-            <a:off x="5114422" y="4206240"/>
-            <a:ext cx="1962851" cy="1645920"/>
+            <a:off x="5096134" y="4389120"/>
+            <a:ext cx="1999427" cy="1645920"/>
           </a:xfrm>
           <a:prstGeom prst="rect">
             <a:avLst/>
@@ -4730,7 +4952,7 @@
             <a:r>
               <a:rPr sz="1300" b="0" i="0">
                 <a:solidFill>
-                  <a:srgbClr val="2B2B2B"/>
+                  <a:srgbClr val="26231F"/>
                 </a:solidFill>
               </a:rPr>
               <a:t>기억을 적어 주세요</a:t>
@@ -4740,20 +4962,20 @@
       </p:sp>
       <p:sp>
         <p:nvSpPr>
-          <p:cNvPr id="17" name="때 4"/>
+          <p:cNvPr id="19" name="때 4"/>
           <p:cNvSpPr/>
           <p:nvPr/>
         </p:nvSpPr>
         <p:spPr>
           <a:xfrm>
-            <a:off x="8040410" y="3154680"/>
+            <a:off x="8076986" y="3337560"/>
             <a:ext cx="402336" cy="402336"/>
           </a:xfrm>
           <a:prstGeom prst="ellipse">
             <a:avLst/>
           </a:prstGeom>
           <a:solidFill>
-            <a:srgbClr val="CEAB1C"/>
+            <a:srgbClr val="D8C579"/>
           </a:solidFill>
           <a:ln w="38100">
             <a:solidFill>
@@ -4771,14 +4993,14 @@
       </p:sp>
       <p:sp>
         <p:nvSpPr>
-          <p:cNvPr id="18" name="TextBox 17"/>
+          <p:cNvPr id="20" name="TextBox 19"/>
           <p:cNvSpPr txBox="1"/>
           <p:nvPr/>
         </p:nvSpPr>
         <p:spPr>
           <a:xfrm>
-            <a:off x="7214433" y="2514600"/>
-            <a:ext cx="2054291" cy="457200"/>
+            <a:off x="7232721" y="2697480"/>
+            <a:ext cx="2090867" cy="457200"/>
           </a:xfrm>
           <a:prstGeom prst="rect">
             <a:avLst/>
@@ -4799,7 +5021,7 @@
             <a:r>
               <a:rPr sz="1400" b="1" i="0">
                 <a:solidFill>
-                  <a:srgbClr val="CEAB1C"/>
+                  <a:srgbClr val="D8C579"/>
                 </a:solidFill>
               </a:rPr>
               <a:t>9개월</a:t>
@@ -4809,14 +5031,14 @@
       </p:sp>
       <p:sp>
         <p:nvSpPr>
-          <p:cNvPr id="19" name="TextBox 18"/>
+          <p:cNvPr id="21" name="TextBox 20"/>
           <p:cNvSpPr txBox="1"/>
           <p:nvPr/>
         </p:nvSpPr>
         <p:spPr>
           <a:xfrm>
-            <a:off x="7260153" y="3703320"/>
-            <a:ext cx="1962851" cy="457200"/>
+            <a:off x="7278441" y="3886200"/>
+            <a:ext cx="1999427" cy="457200"/>
           </a:xfrm>
           <a:prstGeom prst="rect">
             <a:avLst/>
@@ -4837,7 +5059,7 @@
             <a:r>
               <a:rPr sz="1600" b="1" i="0">
                 <a:solidFill>
-                  <a:srgbClr val="756110"/>
+                  <a:srgbClr val="494227"/>
                 </a:solidFill>
               </a:rPr>
               <a:t>첫 이유식</a:t>
@@ -4847,14 +5069,14 @@
       </p:sp>
       <p:sp>
         <p:nvSpPr>
-          <p:cNvPr id="20" name="TextBox 19"/>
+          <p:cNvPr id="22" name="TextBox 21"/>
           <p:cNvSpPr txBox="1"/>
           <p:nvPr/>
         </p:nvSpPr>
         <p:spPr>
           <a:xfrm>
-            <a:off x="7260153" y="4206240"/>
-            <a:ext cx="1962851" cy="1645920"/>
+            <a:off x="7278441" y="4389120"/>
+            <a:ext cx="1999427" cy="1645920"/>
           </a:xfrm>
           <a:prstGeom prst="rect">
             <a:avLst/>
@@ -4875,7 +5097,7 @@
             <a:r>
               <a:rPr sz="1300" b="0" i="0">
                 <a:solidFill>
-                  <a:srgbClr val="2B2B2B"/>
+                  <a:srgbClr val="26231F"/>
                 </a:solidFill>
               </a:rPr>
               <a:t>기억을 적어 주세요</a:t>
@@ -4885,20 +5107,20 @@
       </p:sp>
       <p:sp>
         <p:nvSpPr>
-          <p:cNvPr id="21" name="때 5"/>
+          <p:cNvPr id="23" name="때 5"/>
           <p:cNvSpPr/>
           <p:nvPr/>
         </p:nvSpPr>
         <p:spPr>
           <a:xfrm>
-            <a:off x="10186141" y="3154680"/>
+            <a:off x="10259293" y="3337560"/>
             <a:ext cx="402336" cy="402336"/>
           </a:xfrm>
           <a:prstGeom prst="ellipse">
             <a:avLst/>
           </a:prstGeom>
           <a:solidFill>
-            <a:srgbClr val="CEAB1C"/>
+            <a:srgbClr val="D8C579"/>
           </a:solidFill>
           <a:ln w="38100">
             <a:solidFill>
@@ -4916,14 +5138,14 @@
       </p:sp>
       <p:sp>
         <p:nvSpPr>
-          <p:cNvPr id="22" name="TextBox 21"/>
+          <p:cNvPr id="24" name="TextBox 23"/>
           <p:cNvSpPr txBox="1"/>
           <p:nvPr/>
         </p:nvSpPr>
         <p:spPr>
           <a:xfrm>
-            <a:off x="9360164" y="2514600"/>
-            <a:ext cx="2054291" cy="457200"/>
+            <a:off x="9415028" y="2697480"/>
+            <a:ext cx="2090867" cy="457200"/>
           </a:xfrm>
           <a:prstGeom prst="rect">
             <a:avLst/>
@@ -4944,7 +5166,7 @@
             <a:r>
               <a:rPr sz="1400" b="1" i="0">
                 <a:solidFill>
-                  <a:srgbClr val="CEAB1C"/>
+                  <a:srgbClr val="D8C579"/>
                 </a:solidFill>
               </a:rPr>
               <a:t>12개월</a:t>
@@ -4954,14 +5176,14 @@
       </p:sp>
       <p:sp>
         <p:nvSpPr>
-          <p:cNvPr id="23" name="TextBox 22"/>
+          <p:cNvPr id="25" name="TextBox 24"/>
           <p:cNvSpPr txBox="1"/>
           <p:nvPr/>
         </p:nvSpPr>
         <p:spPr>
           <a:xfrm>
-            <a:off x="9405884" y="3703320"/>
-            <a:ext cx="1962851" cy="457200"/>
+            <a:off x="9460748" y="3886200"/>
+            <a:ext cx="1999427" cy="457200"/>
           </a:xfrm>
           <a:prstGeom prst="rect">
             <a:avLst/>
@@ -4982,7 +5204,7 @@
             <a:r>
               <a:rPr sz="1600" b="1" i="0">
                 <a:solidFill>
-                  <a:srgbClr val="756110"/>
+                  <a:srgbClr val="494227"/>
                 </a:solidFill>
               </a:rPr>
               <a:t>첫 걸음</a:t>
@@ -4992,14 +5214,14 @@
       </p:sp>
       <p:sp>
         <p:nvSpPr>
-          <p:cNvPr id="24" name="TextBox 23"/>
+          <p:cNvPr id="26" name="TextBox 25"/>
           <p:cNvSpPr txBox="1"/>
           <p:nvPr/>
         </p:nvSpPr>
         <p:spPr>
           <a:xfrm>
-            <a:off x="9405884" y="4206240"/>
-            <a:ext cx="1962851" cy="1645920"/>
+            <a:off x="9460748" y="4389120"/>
+            <a:ext cx="1999427" cy="1645920"/>
           </a:xfrm>
           <a:prstGeom prst="rect">
             <a:avLst/>
@@ -5020,7 +5242,7 @@
             <a:r>
               <a:rPr sz="1300" b="0" i="0">
                 <a:solidFill>
-                  <a:srgbClr val="2B2B2B"/>
+                  <a:srgbClr val="26231F"/>
                 </a:solidFill>
               </a:rPr>
               <a:t>기억을 적어 주세요</a:t>
@@ -5042,7 +5264,7 @@
     <p:bg>
       <p:bgPr>
         <a:solidFill>
-          <a:srgbClr val="CEAB1C"/>
+          <a:srgbClr val="F6EFD5"/>
         </a:solidFill>
         <a:effectLst/>
       </p:bgPr>
@@ -5056,22 +5278,20 @@
       <p:grpSpPr/>
       <p:sp>
         <p:nvSpPr>
-          <p:cNvPr id="3" name="장식"/>
+          <p:cNvPr id="3" name="포인트"/>
           <p:cNvSpPr/>
           <p:nvPr/>
         </p:nvSpPr>
         <p:spPr>
           <a:xfrm>
-            <a:off x="274320" y="274320"/>
-            <a:ext cx="11643055" cy="6309360"/>
-          </a:xfrm>
-          <a:prstGeom prst="roundRect">
-            <a:avLst>
-              <a:gd name="adj" fmla="val 3500"/>
-            </a:avLst>
+            <a:off x="5958687" y="246888"/>
+            <a:ext cx="274320" cy="274320"/>
+          </a:xfrm>
+          <a:prstGeom prst="ellipse">
+            <a:avLst/>
           </a:prstGeom>
           <a:solidFill>
-            <a:srgbClr val="FFFFFF"/>
+            <a:srgbClr val="D8C579"/>
           </a:solidFill>
           <a:ln>
             <a:noFill/>
@@ -5082,6 +5302,73 @@
           <a:lstStyle/>
           <a:p>
             <a:pPr algn="ctr"/>
+          </a:p>
+        </p:txBody>
+      </p:sp>
+      <p:sp>
+        <p:nvSpPr>
+          <p:cNvPr id="4" name="장식"/>
+          <p:cNvSpPr/>
+          <p:nvPr/>
+        </p:nvSpPr>
+        <p:spPr>
+          <a:xfrm>
+            <a:off x="5684367" y="1572768"/>
+            <a:ext cx="822960" cy="22860"/>
+          </a:xfrm>
+          <a:prstGeom prst="rect">
+            <a:avLst/>
+          </a:prstGeom>
+          <a:solidFill>
+            <a:srgbClr val="D8C579"/>
+          </a:solidFill>
+          <a:ln>
+            <a:noFill/>
+          </a:ln>
+        </p:spPr>
+        <p:txBody>
+          <a:bodyPr rtlCol="0" anchor="ctr"/>
+          <a:lstStyle/>
+          <a:p>
+            <a:pPr algn="ctr"/>
+          </a:p>
+        </p:txBody>
+      </p:sp>
+      <p:sp>
+        <p:nvSpPr>
+          <p:cNvPr id="5" name="상단 라벨"/>
+          <p:cNvSpPr txBox="1"/>
+          <p:nvPr/>
+        </p:nvSpPr>
+        <p:spPr>
+          <a:xfrm>
+            <a:off x="640080" y="182880"/>
+            <a:ext cx="3657600" cy="274320"/>
+          </a:xfrm>
+          <a:prstGeom prst="rect">
+            <a:avLst/>
+          </a:prstGeom>
+          <a:noFill/>
+        </p:spPr>
+        <p:txBody>
+          <a:bodyPr wrap="square" lIns="54864" rIns="54864" tIns="27432" bIns="27432" anchor="ctr">
+            <a:noAutofit/>
+          </a:bodyPr>
+          <a:lstStyle/>
+          <a:p>
+            <a:pPr algn="l">
+              <a:lnSpc>
+                <a:spcPct val="115000"/>
+              </a:lnSpc>
+            </a:pPr>
+            <a:r>
+              <a:rPr sz="800" b="1" i="0" spc="250">
+                <a:solidFill>
+                  <a:srgbClr val="8E8780"/>
+                </a:solidFill>
+              </a:rPr>
+              <a:t>FIRST BIRTHDAY</a:t>
+            </a:r>
           </a:p>
         </p:txBody>
       </p:sp>
@@ -5097,7 +5384,7 @@
         </p:nvSpPr>
         <p:spPr>
           <a:xfrm>
-            <a:off x="731520" y="548640"/>
+            <a:off x="1371600" y="640080"/>
             <a:ext cx="9448495" cy="868680"/>
           </a:xfrm>
         </p:spPr>
@@ -5107,7 +5394,7 @@
           </a:bodyPr>
           <a:lstStyle/>
           <a:p>
-            <a:pPr algn="l">
+            <a:pPr algn="ctr">
               <a:lnSpc>
                 <a:spcPct val="105000"/>
               </a:lnSpc>
@@ -5115,7 +5402,7 @@
             <a:r>
               <a:rPr sz="3000" b="1" i="0">
                 <a:solidFill>
-                  <a:srgbClr val="756110"/>
+                  <a:srgbClr val="26231F"/>
                 </a:solidFill>
               </a:rPr>
               <a:t>키와 몸무게</a:t>
@@ -5125,15 +5412,15 @@
       </p:sp>
       <p:graphicFrame>
         <p:nvGraphicFramePr>
-          <p:cNvPr id="4" name="표"/>
+          <p:cNvPr id="6" name="표"/>
           <p:cNvGraphicFramePr>
             <a:graphicFrameLocks noGrp="1"/>
           </p:cNvGraphicFramePr>
           <p:nvPr/>
         </p:nvGraphicFramePr>
         <p:xfrm>
-          <a:off x="731520" y="1600200"/>
-          <a:ext cx="10728655" cy="3291840"/>
+          <a:off x="640080" y="1783080"/>
+          <a:ext cx="10911535" cy="3291840"/>
         </p:xfrm>
         <a:graphic>
           <a:graphicData uri="http://schemas.openxmlformats.org/drawingml/2006/table">
@@ -5142,11 +5429,11 @@
                 <a:tableStyleId>{5C22544A-7EE6-4342-B048-85BDC9FD1C3A}</a:tableStyleId>
               </a:tblPr>
               <a:tblGrid>
-                <a:gridCol w="2145731"/>
-                <a:gridCol w="2145731"/>
-                <a:gridCol w="2145731"/>
-                <a:gridCol w="2145731"/>
-                <a:gridCol w="2145731"/>
+                <a:gridCol w="2182307"/>
+                <a:gridCol w="2182307"/>
+                <a:gridCol w="2182307"/>
+                <a:gridCol w="2182307"/>
+                <a:gridCol w="2182307"/>
               </a:tblGrid>
               <a:tr h="822960">
                 <a:tc>
@@ -5158,7 +5445,7 @@
                       <a:r>
                         <a:rPr sz="1600" b="1">
                           <a:solidFill>
-                            <a:srgbClr val="FFFFFF"/>
+                            <a:srgbClr val="26231F"/>
                           </a:solidFill>
                         </a:rPr>
                         <a:t/>
@@ -5168,30 +5455,30 @@
                   <a:tcPr anchor="ctr" marL="73152" marR="73152">
                     <a:lnL w="9525" cap="flat" cmpd="sng" algn="ctr">
                       <a:solidFill>
-                        <a:srgbClr val="CEAB1C"/>
+                        <a:srgbClr val="D8C579"/>
                       </a:solidFill>
                       <a:prstDash val="solid"/>
                     </a:lnL>
                     <a:lnR w="9525" cap="flat" cmpd="sng" algn="ctr">
                       <a:solidFill>
-                        <a:srgbClr val="CEAB1C"/>
+                        <a:srgbClr val="D8C579"/>
                       </a:solidFill>
                       <a:prstDash val="solid"/>
                     </a:lnR>
                     <a:lnT w="9525" cap="flat" cmpd="sng" algn="ctr">
                       <a:solidFill>
-                        <a:srgbClr val="CEAB1C"/>
+                        <a:srgbClr val="D8C579"/>
                       </a:solidFill>
                       <a:prstDash val="solid"/>
                     </a:lnT>
                     <a:lnB w="9525" cap="flat" cmpd="sng" algn="ctr">
                       <a:solidFill>
-                        <a:srgbClr val="CEAB1C"/>
+                        <a:srgbClr val="D8C579"/>
                       </a:solidFill>
                       <a:prstDash val="solid"/>
                     </a:lnB>
                     <a:solidFill>
-                      <a:srgbClr val="CEAB1C"/>
+                      <a:srgbClr val="D8C579"/>
                     </a:solidFill>
                   </a:tcPr>
                 </a:tc>
@@ -5204,7 +5491,7 @@
                       <a:r>
                         <a:rPr sz="1600" b="1">
                           <a:solidFill>
-                            <a:srgbClr val="FFFFFF"/>
+                            <a:srgbClr val="26231F"/>
                           </a:solidFill>
                         </a:rPr>
                         <a:t>3개월</a:t>
@@ -5214,30 +5501,30 @@
                   <a:tcPr anchor="ctr" marL="73152" marR="73152">
                     <a:lnL w="9525" cap="flat" cmpd="sng" algn="ctr">
                       <a:solidFill>
-                        <a:srgbClr val="CEAB1C"/>
+                        <a:srgbClr val="D8C579"/>
                       </a:solidFill>
                       <a:prstDash val="solid"/>
                     </a:lnL>
                     <a:lnR w="9525" cap="flat" cmpd="sng" algn="ctr">
                       <a:solidFill>
-                        <a:srgbClr val="CEAB1C"/>
+                        <a:srgbClr val="D8C579"/>
                       </a:solidFill>
                       <a:prstDash val="solid"/>
                     </a:lnR>
                     <a:lnT w="9525" cap="flat" cmpd="sng" algn="ctr">
                       <a:solidFill>
-                        <a:srgbClr val="CEAB1C"/>
+                        <a:srgbClr val="D8C579"/>
                       </a:solidFill>
                       <a:prstDash val="solid"/>
                     </a:lnT>
                     <a:lnB w="9525" cap="flat" cmpd="sng" algn="ctr">
                       <a:solidFill>
-                        <a:srgbClr val="CEAB1C"/>
+                        <a:srgbClr val="D8C579"/>
                       </a:solidFill>
                       <a:prstDash val="solid"/>
                     </a:lnB>
                     <a:solidFill>
-                      <a:srgbClr val="CEAB1C"/>
+                      <a:srgbClr val="D8C579"/>
                     </a:solidFill>
                   </a:tcPr>
                 </a:tc>
@@ -5250,7 +5537,7 @@
                       <a:r>
                         <a:rPr sz="1600" b="1">
                           <a:solidFill>
-                            <a:srgbClr val="FFFFFF"/>
+                            <a:srgbClr val="26231F"/>
                           </a:solidFill>
                         </a:rPr>
                         <a:t>6개월</a:t>
@@ -5260,30 +5547,30 @@
                   <a:tcPr anchor="ctr" marL="73152" marR="73152">
                     <a:lnL w="9525" cap="flat" cmpd="sng" algn="ctr">
                       <a:solidFill>
-                        <a:srgbClr val="CEAB1C"/>
+                        <a:srgbClr val="D8C579"/>
                       </a:solidFill>
                       <a:prstDash val="solid"/>
                     </a:lnL>
                     <a:lnR w="9525" cap="flat" cmpd="sng" algn="ctr">
                       <a:solidFill>
-                        <a:srgbClr val="CEAB1C"/>
+                        <a:srgbClr val="D8C579"/>
                       </a:solidFill>
                       <a:prstDash val="solid"/>
                     </a:lnR>
                     <a:lnT w="9525" cap="flat" cmpd="sng" algn="ctr">
                       <a:solidFill>
-                        <a:srgbClr val="CEAB1C"/>
+                        <a:srgbClr val="D8C579"/>
                       </a:solidFill>
                       <a:prstDash val="solid"/>
                     </a:lnT>
                     <a:lnB w="9525" cap="flat" cmpd="sng" algn="ctr">
                       <a:solidFill>
-                        <a:srgbClr val="CEAB1C"/>
+                        <a:srgbClr val="D8C579"/>
                       </a:solidFill>
                       <a:prstDash val="solid"/>
                     </a:lnB>
                     <a:solidFill>
-                      <a:srgbClr val="CEAB1C"/>
+                      <a:srgbClr val="D8C579"/>
                     </a:solidFill>
                   </a:tcPr>
                 </a:tc>
@@ -5296,7 +5583,7 @@
                       <a:r>
                         <a:rPr sz="1600" b="1">
                           <a:solidFill>
-                            <a:srgbClr val="FFFFFF"/>
+                            <a:srgbClr val="26231F"/>
                           </a:solidFill>
                         </a:rPr>
                         <a:t>9개월</a:t>
@@ -5306,30 +5593,30 @@
                   <a:tcPr anchor="ctr" marL="73152" marR="73152">
                     <a:lnL w="9525" cap="flat" cmpd="sng" algn="ctr">
                       <a:solidFill>
-                        <a:srgbClr val="CEAB1C"/>
+                        <a:srgbClr val="D8C579"/>
                       </a:solidFill>
                       <a:prstDash val="solid"/>
                     </a:lnL>
                     <a:lnR w="9525" cap="flat" cmpd="sng" algn="ctr">
                       <a:solidFill>
-                        <a:srgbClr val="CEAB1C"/>
+                        <a:srgbClr val="D8C579"/>
                       </a:solidFill>
                       <a:prstDash val="solid"/>
                     </a:lnR>
                     <a:lnT w="9525" cap="flat" cmpd="sng" algn="ctr">
                       <a:solidFill>
-                        <a:srgbClr val="CEAB1C"/>
+                        <a:srgbClr val="D8C579"/>
                       </a:solidFill>
                       <a:prstDash val="solid"/>
                     </a:lnT>
                     <a:lnB w="9525" cap="flat" cmpd="sng" algn="ctr">
                       <a:solidFill>
-                        <a:srgbClr val="CEAB1C"/>
+                        <a:srgbClr val="D8C579"/>
                       </a:solidFill>
                       <a:prstDash val="solid"/>
                     </a:lnB>
                     <a:solidFill>
-                      <a:srgbClr val="CEAB1C"/>
+                      <a:srgbClr val="D8C579"/>
                     </a:solidFill>
                   </a:tcPr>
                 </a:tc>
@@ -5342,7 +5629,7 @@
                       <a:r>
                         <a:rPr sz="1600" b="1">
                           <a:solidFill>
-                            <a:srgbClr val="FFFFFF"/>
+                            <a:srgbClr val="26231F"/>
                           </a:solidFill>
                         </a:rPr>
                         <a:t>12개월</a:t>
@@ -5352,30 +5639,30 @@
                   <a:tcPr anchor="ctr" marL="73152" marR="73152">
                     <a:lnL w="9525" cap="flat" cmpd="sng" algn="ctr">
                       <a:solidFill>
-                        <a:srgbClr val="CEAB1C"/>
+                        <a:srgbClr val="D8C579"/>
                       </a:solidFill>
                       <a:prstDash val="solid"/>
                     </a:lnL>
                     <a:lnR w="9525" cap="flat" cmpd="sng" algn="ctr">
                       <a:solidFill>
-                        <a:srgbClr val="CEAB1C"/>
+                        <a:srgbClr val="D8C579"/>
                       </a:solidFill>
                       <a:prstDash val="solid"/>
                     </a:lnR>
                     <a:lnT w="9525" cap="flat" cmpd="sng" algn="ctr">
                       <a:solidFill>
-                        <a:srgbClr val="CEAB1C"/>
+                        <a:srgbClr val="D8C579"/>
                       </a:solidFill>
                       <a:prstDash val="solid"/>
                     </a:lnT>
                     <a:lnB w="9525" cap="flat" cmpd="sng" algn="ctr">
                       <a:solidFill>
-                        <a:srgbClr val="CEAB1C"/>
+                        <a:srgbClr val="D8C579"/>
                       </a:solidFill>
                       <a:prstDash val="solid"/>
                     </a:lnB>
                     <a:solidFill>
-                      <a:srgbClr val="CEAB1C"/>
+                      <a:srgbClr val="D8C579"/>
                     </a:solidFill>
                   </a:tcPr>
                 </a:tc>
@@ -5390,7 +5677,7 @@
                       <a:r>
                         <a:rPr sz="1600" b="1">
                           <a:solidFill>
-                            <a:srgbClr val="756110"/>
+                            <a:srgbClr val="494227"/>
                           </a:solidFill>
                         </a:rPr>
                         <a:t>키(cm)</a:t>
@@ -5400,30 +5687,30 @@
                   <a:tcPr anchor="ctr" marL="73152" marR="73152">
                     <a:lnL w="9525" cap="flat" cmpd="sng" algn="ctr">
                       <a:solidFill>
-                        <a:srgbClr val="F9EFC8"/>
+                        <a:srgbClr val="F6EFD5"/>
                       </a:solidFill>
                       <a:prstDash val="solid"/>
                     </a:lnL>
                     <a:lnR w="9525" cap="flat" cmpd="sng" algn="ctr">
                       <a:solidFill>
-                        <a:srgbClr val="F9EFC8"/>
+                        <a:srgbClr val="F6EFD5"/>
                       </a:solidFill>
                       <a:prstDash val="solid"/>
                     </a:lnR>
                     <a:lnT w="9525" cap="flat" cmpd="sng" algn="ctr">
                       <a:solidFill>
-                        <a:srgbClr val="F9EFC8"/>
+                        <a:srgbClr val="F6EFD5"/>
                       </a:solidFill>
                       <a:prstDash val="solid"/>
                     </a:lnT>
                     <a:lnB w="9525" cap="flat" cmpd="sng" algn="ctr">
                       <a:solidFill>
-                        <a:srgbClr val="F9EFC8"/>
+                        <a:srgbClr val="F6EFD5"/>
                       </a:solidFill>
                       <a:prstDash val="solid"/>
                     </a:lnB>
                     <a:solidFill>
-                      <a:srgbClr val="F9EFC8"/>
+                      <a:srgbClr val="F6EFD5"/>
                     </a:solidFill>
                   </a:tcPr>
                 </a:tc>
@@ -5436,7 +5723,7 @@
                       <a:r>
                         <a:rPr sz="1600" b="0">
                           <a:solidFill>
-                            <a:srgbClr val="2B2B2B"/>
+                            <a:srgbClr val="26231F"/>
                           </a:solidFill>
                         </a:rPr>
                         <a:t/>
@@ -5446,25 +5733,25 @@
                   <a:tcPr anchor="ctr" marL="73152" marR="73152">
                     <a:lnL w="9525" cap="flat" cmpd="sng" algn="ctr">
                       <a:solidFill>
-                        <a:srgbClr val="F9EFC8"/>
+                        <a:srgbClr val="F6EFD5"/>
                       </a:solidFill>
                       <a:prstDash val="solid"/>
                     </a:lnL>
                     <a:lnR w="9525" cap="flat" cmpd="sng" algn="ctr">
                       <a:solidFill>
-                        <a:srgbClr val="F9EFC8"/>
+                        <a:srgbClr val="F6EFD5"/>
                       </a:solidFill>
                       <a:prstDash val="solid"/>
                     </a:lnR>
                     <a:lnT w="9525" cap="flat" cmpd="sng" algn="ctr">
                       <a:solidFill>
-                        <a:srgbClr val="F9EFC8"/>
+                        <a:srgbClr val="F6EFD5"/>
                       </a:solidFill>
                       <a:prstDash val="solid"/>
                     </a:lnT>
                     <a:lnB w="9525" cap="flat" cmpd="sng" algn="ctr">
                       <a:solidFill>
-                        <a:srgbClr val="F9EFC8"/>
+                        <a:srgbClr val="F6EFD5"/>
                       </a:solidFill>
                       <a:prstDash val="solid"/>
                     </a:lnB>
@@ -5482,7 +5769,7 @@
                       <a:r>
                         <a:rPr sz="1600" b="0">
                           <a:solidFill>
-                            <a:srgbClr val="2B2B2B"/>
+                            <a:srgbClr val="26231F"/>
                           </a:solidFill>
                         </a:rPr>
                         <a:t/>
@@ -5492,25 +5779,25 @@
                   <a:tcPr anchor="ctr" marL="73152" marR="73152">
                     <a:lnL w="9525" cap="flat" cmpd="sng" algn="ctr">
                       <a:solidFill>
-                        <a:srgbClr val="F9EFC8"/>
+                        <a:srgbClr val="F6EFD5"/>
                       </a:solidFill>
                       <a:prstDash val="solid"/>
                     </a:lnL>
                     <a:lnR w="9525" cap="flat" cmpd="sng" algn="ctr">
                       <a:solidFill>
-                        <a:srgbClr val="F9EFC8"/>
+                        <a:srgbClr val="F6EFD5"/>
                       </a:solidFill>
                       <a:prstDash val="solid"/>
                     </a:lnR>
                     <a:lnT w="9525" cap="flat" cmpd="sng" algn="ctr">
                       <a:solidFill>
-                        <a:srgbClr val="F9EFC8"/>
+                        <a:srgbClr val="F6EFD5"/>
                       </a:solidFill>
                       <a:prstDash val="solid"/>
                     </a:lnT>
                     <a:lnB w="9525" cap="flat" cmpd="sng" algn="ctr">
                       <a:solidFill>
-                        <a:srgbClr val="F9EFC8"/>
+                        <a:srgbClr val="F6EFD5"/>
                       </a:solidFill>
                       <a:prstDash val="solid"/>
                     </a:lnB>
@@ -5528,7 +5815,7 @@
                       <a:r>
                         <a:rPr sz="1600" b="0">
                           <a:solidFill>
-                            <a:srgbClr val="2B2B2B"/>
+                            <a:srgbClr val="26231F"/>
                           </a:solidFill>
                         </a:rPr>
                         <a:t/>
@@ -5538,25 +5825,25 @@
                   <a:tcPr anchor="ctr" marL="73152" marR="73152">
                     <a:lnL w="9525" cap="flat" cmpd="sng" algn="ctr">
                       <a:solidFill>
-                        <a:srgbClr val="F9EFC8"/>
+                        <a:srgbClr val="F6EFD5"/>
                       </a:solidFill>
                       <a:prstDash val="solid"/>
                     </a:lnL>
                     <a:lnR w="9525" cap="flat" cmpd="sng" algn="ctr">
                       <a:solidFill>
-                        <a:srgbClr val="F9EFC8"/>
+                        <a:srgbClr val="F6EFD5"/>
                       </a:solidFill>
                       <a:prstDash val="solid"/>
                     </a:lnR>
                     <a:lnT w="9525" cap="flat" cmpd="sng" algn="ctr">
                       <a:solidFill>
-                        <a:srgbClr val="F9EFC8"/>
+                        <a:srgbClr val="F6EFD5"/>
                       </a:solidFill>
                       <a:prstDash val="solid"/>
                     </a:lnT>
                     <a:lnB w="9525" cap="flat" cmpd="sng" algn="ctr">
                       <a:solidFill>
-                        <a:srgbClr val="F9EFC8"/>
+                        <a:srgbClr val="F6EFD5"/>
                       </a:solidFill>
                       <a:prstDash val="solid"/>
                     </a:lnB>
@@ -5574,7 +5861,7 @@
                       <a:r>
                         <a:rPr sz="1600" b="0">
                           <a:solidFill>
-                            <a:srgbClr val="2B2B2B"/>
+                            <a:srgbClr val="26231F"/>
                           </a:solidFill>
                         </a:rPr>
                         <a:t/>
@@ -5584,25 +5871,25 @@
                   <a:tcPr anchor="ctr" marL="73152" marR="73152">
                     <a:lnL w="9525" cap="flat" cmpd="sng" algn="ctr">
                       <a:solidFill>
-                        <a:srgbClr val="F9EFC8"/>
+                        <a:srgbClr val="F6EFD5"/>
                       </a:solidFill>
                       <a:prstDash val="solid"/>
                     </a:lnL>
                     <a:lnR w="9525" cap="flat" cmpd="sng" algn="ctr">
                       <a:solidFill>
-                        <a:srgbClr val="F9EFC8"/>
+                        <a:srgbClr val="F6EFD5"/>
                       </a:solidFill>
                       <a:prstDash val="solid"/>
                     </a:lnR>
                     <a:lnT w="9525" cap="flat" cmpd="sng" algn="ctr">
                       <a:solidFill>
-                        <a:srgbClr val="F9EFC8"/>
+                        <a:srgbClr val="F6EFD5"/>
                       </a:solidFill>
                       <a:prstDash val="solid"/>
                     </a:lnT>
                     <a:lnB w="9525" cap="flat" cmpd="sng" algn="ctr">
                       <a:solidFill>
-                        <a:srgbClr val="F9EFC8"/>
+                        <a:srgbClr val="F6EFD5"/>
                       </a:solidFill>
                       <a:prstDash val="solid"/>
                     </a:lnB>
@@ -5622,7 +5909,7 @@
                       <a:r>
                         <a:rPr sz="1600" b="1">
                           <a:solidFill>
-                            <a:srgbClr val="756110"/>
+                            <a:srgbClr val="494227"/>
                           </a:solidFill>
                         </a:rPr>
                         <a:t>몸무게(kg)</a:t>
@@ -5632,30 +5919,30 @@
                   <a:tcPr anchor="ctr" marL="73152" marR="73152">
                     <a:lnL w="9525" cap="flat" cmpd="sng" algn="ctr">
                       <a:solidFill>
-                        <a:srgbClr val="F9EFC8"/>
+                        <a:srgbClr val="F6EFD5"/>
                       </a:solidFill>
                       <a:prstDash val="solid"/>
                     </a:lnL>
                     <a:lnR w="9525" cap="flat" cmpd="sng" algn="ctr">
                       <a:solidFill>
-                        <a:srgbClr val="F9EFC8"/>
+                        <a:srgbClr val="F6EFD5"/>
                       </a:solidFill>
                       <a:prstDash val="solid"/>
                     </a:lnR>
                     <a:lnT w="9525" cap="flat" cmpd="sng" algn="ctr">
                       <a:solidFill>
-                        <a:srgbClr val="F9EFC8"/>
+                        <a:srgbClr val="F6EFD5"/>
                       </a:solidFill>
                       <a:prstDash val="solid"/>
                     </a:lnT>
                     <a:lnB w="9525" cap="flat" cmpd="sng" algn="ctr">
                       <a:solidFill>
-                        <a:srgbClr val="F9EFC8"/>
+                        <a:srgbClr val="F6EFD5"/>
                       </a:solidFill>
                       <a:prstDash val="solid"/>
                     </a:lnB>
                     <a:solidFill>
-                      <a:srgbClr val="F9EFC8"/>
+                      <a:srgbClr val="F6EFD5"/>
                     </a:solidFill>
                   </a:tcPr>
                 </a:tc>
@@ -5668,7 +5955,7 @@
                       <a:r>
                         <a:rPr sz="1600" b="0">
                           <a:solidFill>
-                            <a:srgbClr val="2B2B2B"/>
+                            <a:srgbClr val="26231F"/>
                           </a:solidFill>
                         </a:rPr>
                         <a:t/>
@@ -5678,30 +5965,30 @@
                   <a:tcPr anchor="ctr" marL="73152" marR="73152">
                     <a:lnL w="9525" cap="flat" cmpd="sng" algn="ctr">
                       <a:solidFill>
-                        <a:srgbClr val="F9EFC8"/>
+                        <a:srgbClr val="F6EFD5"/>
                       </a:solidFill>
                       <a:prstDash val="solid"/>
                     </a:lnL>
                     <a:lnR w="9525" cap="flat" cmpd="sng" algn="ctr">
                       <a:solidFill>
-                        <a:srgbClr val="F9EFC8"/>
+                        <a:srgbClr val="F6EFD5"/>
                       </a:solidFill>
                       <a:prstDash val="solid"/>
                     </a:lnR>
                     <a:lnT w="9525" cap="flat" cmpd="sng" algn="ctr">
                       <a:solidFill>
-                        <a:srgbClr val="F9EFC8"/>
+                        <a:srgbClr val="F6EFD5"/>
                       </a:solidFill>
                       <a:prstDash val="solid"/>
                     </a:lnT>
                     <a:lnB w="9525" cap="flat" cmpd="sng" algn="ctr">
                       <a:solidFill>
-                        <a:srgbClr val="F9EFC8"/>
+                        <a:srgbClr val="F6EFD5"/>
                       </a:solidFill>
                       <a:prstDash val="solid"/>
                     </a:lnB>
                     <a:solidFill>
-                      <a:srgbClr val="FDF9ED"/>
+                      <a:srgbClr val="FBF8EC"/>
                     </a:solidFill>
                   </a:tcPr>
                 </a:tc>
@@ -5714,7 +6001,7 @@
                       <a:r>
                         <a:rPr sz="1600" b="0">
                           <a:solidFill>
-                            <a:srgbClr val="2B2B2B"/>
+                            <a:srgbClr val="26231F"/>
                           </a:solidFill>
                         </a:rPr>
                         <a:t/>
@@ -5724,30 +6011,30 @@
                   <a:tcPr anchor="ctr" marL="73152" marR="73152">
                     <a:lnL w="9525" cap="flat" cmpd="sng" algn="ctr">
                       <a:solidFill>
-                        <a:srgbClr val="F9EFC8"/>
+                        <a:srgbClr val="F6EFD5"/>
                       </a:solidFill>
                       <a:prstDash val="solid"/>
                     </a:lnL>
                     <a:lnR w="9525" cap="flat" cmpd="sng" algn="ctr">
                       <a:solidFill>
-                        <a:srgbClr val="F9EFC8"/>
+                        <a:srgbClr val="F6EFD5"/>
                       </a:solidFill>
                       <a:prstDash val="solid"/>
                     </a:lnR>
                     <a:lnT w="9525" cap="flat" cmpd="sng" algn="ctr">
                       <a:solidFill>
-                        <a:srgbClr val="F9EFC8"/>
+                        <a:srgbClr val="F6EFD5"/>
                       </a:solidFill>
                       <a:prstDash val="solid"/>
                     </a:lnT>
                     <a:lnB w="9525" cap="flat" cmpd="sng" algn="ctr">
                       <a:solidFill>
-                        <a:srgbClr val="F9EFC8"/>
+                        <a:srgbClr val="F6EFD5"/>
                       </a:solidFill>
                       <a:prstDash val="solid"/>
                     </a:lnB>
                     <a:solidFill>
-                      <a:srgbClr val="FDF9ED"/>
+                      <a:srgbClr val="FBF8EC"/>
                     </a:solidFill>
                   </a:tcPr>
                 </a:tc>
@@ -5760,7 +6047,7 @@
                       <a:r>
                         <a:rPr sz="1600" b="0">
                           <a:solidFill>
-                            <a:srgbClr val="2B2B2B"/>
+                            <a:srgbClr val="26231F"/>
                           </a:solidFill>
                         </a:rPr>
                         <a:t/>
@@ -5770,30 +6057,30 @@
                   <a:tcPr anchor="ctr" marL="73152" marR="73152">
                     <a:lnL w="9525" cap="flat" cmpd="sng" algn="ctr">
                       <a:solidFill>
-                        <a:srgbClr val="F9EFC8"/>
+                        <a:srgbClr val="F6EFD5"/>
                       </a:solidFill>
                       <a:prstDash val="solid"/>
                     </a:lnL>
                     <a:lnR w="9525" cap="flat" cmpd="sng" algn="ctr">
                       <a:solidFill>
-                        <a:srgbClr val="F9EFC8"/>
+                        <a:srgbClr val="F6EFD5"/>
                       </a:solidFill>
                       <a:prstDash val="solid"/>
                     </a:lnR>
                     <a:lnT w="9525" cap="flat" cmpd="sng" algn="ctr">
                       <a:solidFill>
-                        <a:srgbClr val="F9EFC8"/>
+                        <a:srgbClr val="F6EFD5"/>
                       </a:solidFill>
                       <a:prstDash val="solid"/>
                     </a:lnT>
                     <a:lnB w="9525" cap="flat" cmpd="sng" algn="ctr">
                       <a:solidFill>
-                        <a:srgbClr val="F9EFC8"/>
+                        <a:srgbClr val="F6EFD5"/>
                       </a:solidFill>
                       <a:prstDash val="solid"/>
                     </a:lnB>
                     <a:solidFill>
-                      <a:srgbClr val="FDF9ED"/>
+                      <a:srgbClr val="FBF8EC"/>
                     </a:solidFill>
                   </a:tcPr>
                 </a:tc>
@@ -5806,7 +6093,7 @@
                       <a:r>
                         <a:rPr sz="1600" b="0">
                           <a:solidFill>
-                            <a:srgbClr val="2B2B2B"/>
+                            <a:srgbClr val="26231F"/>
                           </a:solidFill>
                         </a:rPr>
                         <a:t/>
@@ -5816,30 +6103,30 @@
                   <a:tcPr anchor="ctr" marL="73152" marR="73152">
                     <a:lnL w="9525" cap="flat" cmpd="sng" algn="ctr">
                       <a:solidFill>
-                        <a:srgbClr val="F9EFC8"/>
+                        <a:srgbClr val="F6EFD5"/>
                       </a:solidFill>
                       <a:prstDash val="solid"/>
                     </a:lnL>
                     <a:lnR w="9525" cap="flat" cmpd="sng" algn="ctr">
                       <a:solidFill>
-                        <a:srgbClr val="F9EFC8"/>
+                        <a:srgbClr val="F6EFD5"/>
                       </a:solidFill>
                       <a:prstDash val="solid"/>
                     </a:lnR>
                     <a:lnT w="9525" cap="flat" cmpd="sng" algn="ctr">
                       <a:solidFill>
-                        <a:srgbClr val="F9EFC8"/>
+                        <a:srgbClr val="F6EFD5"/>
                       </a:solidFill>
                       <a:prstDash val="solid"/>
                     </a:lnT>
                     <a:lnB w="9525" cap="flat" cmpd="sng" algn="ctr">
                       <a:solidFill>
-                        <a:srgbClr val="F9EFC8"/>
+                        <a:srgbClr val="F6EFD5"/>
                       </a:solidFill>
                       <a:prstDash val="solid"/>
                     </a:lnB>
                     <a:solidFill>
-                      <a:srgbClr val="FDF9ED"/>
+                      <a:srgbClr val="FBF8EC"/>
                     </a:solidFill>
                   </a:tcPr>
                 </a:tc>
@@ -5854,7 +6141,7 @@
                       <a:r>
                         <a:rPr sz="1600" b="1">
                           <a:solidFill>
-                            <a:srgbClr val="756110"/>
+                            <a:srgbClr val="494227"/>
                           </a:solidFill>
                         </a:rPr>
                         <a:t>새로 한 것</a:t>
@@ -5864,30 +6151,30 @@
                   <a:tcPr anchor="ctr" marL="73152" marR="73152">
                     <a:lnL w="9525" cap="flat" cmpd="sng" algn="ctr">
                       <a:solidFill>
-                        <a:srgbClr val="F9EFC8"/>
+                        <a:srgbClr val="F6EFD5"/>
                       </a:solidFill>
                       <a:prstDash val="solid"/>
                     </a:lnL>
                     <a:lnR w="9525" cap="flat" cmpd="sng" algn="ctr">
                       <a:solidFill>
-                        <a:srgbClr val="F9EFC8"/>
+                        <a:srgbClr val="F6EFD5"/>
                       </a:solidFill>
                       <a:prstDash val="solid"/>
                     </a:lnR>
                     <a:lnT w="9525" cap="flat" cmpd="sng" algn="ctr">
                       <a:solidFill>
-                        <a:srgbClr val="F9EFC8"/>
+                        <a:srgbClr val="F6EFD5"/>
                       </a:solidFill>
                       <a:prstDash val="solid"/>
                     </a:lnT>
                     <a:lnB w="9525" cap="flat" cmpd="sng" algn="ctr">
                       <a:solidFill>
-                        <a:srgbClr val="F9EFC8"/>
+                        <a:srgbClr val="F6EFD5"/>
                       </a:solidFill>
                       <a:prstDash val="solid"/>
                     </a:lnB>
                     <a:solidFill>
-                      <a:srgbClr val="F9EFC8"/>
+                      <a:srgbClr val="F6EFD5"/>
                     </a:solidFill>
                   </a:tcPr>
                 </a:tc>
@@ -5900,7 +6187,7 @@
                       <a:r>
                         <a:rPr sz="1600" b="0">
                           <a:solidFill>
-                            <a:srgbClr val="2B2B2B"/>
+                            <a:srgbClr val="26231F"/>
                           </a:solidFill>
                         </a:rPr>
                         <a:t/>
@@ -5910,25 +6197,25 @@
                   <a:tcPr anchor="ctr" marL="73152" marR="73152">
                     <a:lnL w="9525" cap="flat" cmpd="sng" algn="ctr">
                       <a:solidFill>
-                        <a:srgbClr val="F9EFC8"/>
+                        <a:srgbClr val="F6EFD5"/>
                       </a:solidFill>
                       <a:prstDash val="solid"/>
                     </a:lnL>
                     <a:lnR w="9525" cap="flat" cmpd="sng" algn="ctr">
                       <a:solidFill>
-                        <a:srgbClr val="F9EFC8"/>
+                        <a:srgbClr val="F6EFD5"/>
                       </a:solidFill>
                       <a:prstDash val="solid"/>
                     </a:lnR>
                     <a:lnT w="9525" cap="flat" cmpd="sng" algn="ctr">
                       <a:solidFill>
-                        <a:srgbClr val="F9EFC8"/>
+                        <a:srgbClr val="F6EFD5"/>
                       </a:solidFill>
                       <a:prstDash val="solid"/>
                     </a:lnT>
                     <a:lnB w="9525" cap="flat" cmpd="sng" algn="ctr">
                       <a:solidFill>
-                        <a:srgbClr val="F9EFC8"/>
+                        <a:srgbClr val="F6EFD5"/>
                       </a:solidFill>
                       <a:prstDash val="solid"/>
                     </a:lnB>
@@ -5946,7 +6233,7 @@
                       <a:r>
                         <a:rPr sz="1600" b="0">
                           <a:solidFill>
-                            <a:srgbClr val="2B2B2B"/>
+                            <a:srgbClr val="26231F"/>
                           </a:solidFill>
                         </a:rPr>
                         <a:t/>
@@ -5956,25 +6243,25 @@
                   <a:tcPr anchor="ctr" marL="73152" marR="73152">
                     <a:lnL w="9525" cap="flat" cmpd="sng" algn="ctr">
                       <a:solidFill>
-                        <a:srgbClr val="F9EFC8"/>
+                        <a:srgbClr val="F6EFD5"/>
                       </a:solidFill>
                       <a:prstDash val="solid"/>
                     </a:lnL>
                     <a:lnR w="9525" cap="flat" cmpd="sng" algn="ctr">
                       <a:solidFill>
-                        <a:srgbClr val="F9EFC8"/>
+                        <a:srgbClr val="F6EFD5"/>
                       </a:solidFill>
                       <a:prstDash val="solid"/>
                     </a:lnR>
                     <a:lnT w="9525" cap="flat" cmpd="sng" algn="ctr">
                       <a:solidFill>
-                        <a:srgbClr val="F9EFC8"/>
+                        <a:srgbClr val="F6EFD5"/>
                       </a:solidFill>
                       <a:prstDash val="solid"/>
                     </a:lnT>
                     <a:lnB w="9525" cap="flat" cmpd="sng" algn="ctr">
                       <a:solidFill>
-                        <a:srgbClr val="F9EFC8"/>
+                        <a:srgbClr val="F6EFD5"/>
                       </a:solidFill>
                       <a:prstDash val="solid"/>
                     </a:lnB>
@@ -5992,7 +6279,7 @@
                       <a:r>
                         <a:rPr sz="1600" b="0">
                           <a:solidFill>
-                            <a:srgbClr val="2B2B2B"/>
+                            <a:srgbClr val="26231F"/>
                           </a:solidFill>
                         </a:rPr>
                         <a:t/>
@@ -6002,25 +6289,25 @@
                   <a:tcPr anchor="ctr" marL="73152" marR="73152">
                     <a:lnL w="9525" cap="flat" cmpd="sng" algn="ctr">
                       <a:solidFill>
-                        <a:srgbClr val="F9EFC8"/>
+                        <a:srgbClr val="F6EFD5"/>
                       </a:solidFill>
                       <a:prstDash val="solid"/>
                     </a:lnL>
                     <a:lnR w="9525" cap="flat" cmpd="sng" algn="ctr">
                       <a:solidFill>
-                        <a:srgbClr val="F9EFC8"/>
+                        <a:srgbClr val="F6EFD5"/>
                       </a:solidFill>
                       <a:prstDash val="solid"/>
                     </a:lnR>
                     <a:lnT w="9525" cap="flat" cmpd="sng" algn="ctr">
                       <a:solidFill>
-                        <a:srgbClr val="F9EFC8"/>
+                        <a:srgbClr val="F6EFD5"/>
                       </a:solidFill>
                       <a:prstDash val="solid"/>
                     </a:lnT>
                     <a:lnB w="9525" cap="flat" cmpd="sng" algn="ctr">
                       <a:solidFill>
-                        <a:srgbClr val="F9EFC8"/>
+                        <a:srgbClr val="F6EFD5"/>
                       </a:solidFill>
                       <a:prstDash val="solid"/>
                     </a:lnB>
@@ -6038,7 +6325,7 @@
                       <a:r>
                         <a:rPr sz="1600" b="0">
                           <a:solidFill>
-                            <a:srgbClr val="2B2B2B"/>
+                            <a:srgbClr val="26231F"/>
                           </a:solidFill>
                         </a:rPr>
                         <a:t/>
@@ -6048,25 +6335,25 @@
                   <a:tcPr anchor="ctr" marL="73152" marR="73152">
                     <a:lnL w="9525" cap="flat" cmpd="sng" algn="ctr">
                       <a:solidFill>
-                        <a:srgbClr val="F9EFC8"/>
+                        <a:srgbClr val="F6EFD5"/>
                       </a:solidFill>
                       <a:prstDash val="solid"/>
                     </a:lnL>
                     <a:lnR w="9525" cap="flat" cmpd="sng" algn="ctr">
                       <a:solidFill>
-                        <a:srgbClr val="F9EFC8"/>
+                        <a:srgbClr val="F6EFD5"/>
                       </a:solidFill>
                       <a:prstDash val="solid"/>
                     </a:lnR>
                     <a:lnT w="9525" cap="flat" cmpd="sng" algn="ctr">
                       <a:solidFill>
-                        <a:srgbClr val="F9EFC8"/>
+                        <a:srgbClr val="F6EFD5"/>
                       </a:solidFill>
                       <a:prstDash val="solid"/>
                     </a:lnT>
                     <a:lnB w="9525" cap="flat" cmpd="sng" algn="ctr">
                       <a:solidFill>
-                        <a:srgbClr val="F9EFC8"/>
+                        <a:srgbClr val="F6EFD5"/>
                       </a:solidFill>
                       <a:prstDash val="solid"/>
                     </a:lnB>
@@ -6094,7 +6381,7 @@
     <p:bg>
       <p:bgPr>
         <a:solidFill>
-          <a:srgbClr val="CEAB1C"/>
+          <a:srgbClr val="F6EFD5"/>
         </a:solidFill>
         <a:effectLst/>
       </p:bgPr>
@@ -6108,22 +6395,20 @@
       <p:grpSpPr/>
       <p:sp>
         <p:nvSpPr>
-          <p:cNvPr id="3" name="장식"/>
+          <p:cNvPr id="3" name="포인트"/>
           <p:cNvSpPr/>
           <p:nvPr/>
         </p:nvSpPr>
         <p:spPr>
           <a:xfrm>
-            <a:off x="274320" y="274320"/>
-            <a:ext cx="11643055" cy="6309360"/>
-          </a:xfrm>
-          <a:prstGeom prst="roundRect">
-            <a:avLst>
-              <a:gd name="adj" fmla="val 3500"/>
-            </a:avLst>
+            <a:off x="5958687" y="246888"/>
+            <a:ext cx="274320" cy="274320"/>
+          </a:xfrm>
+          <a:prstGeom prst="ellipse">
+            <a:avLst/>
           </a:prstGeom>
           <a:solidFill>
-            <a:srgbClr val="FFFFFF"/>
+            <a:srgbClr val="D8C579"/>
           </a:solidFill>
           <a:ln>
             <a:noFill/>
@@ -6134,6 +6419,73 @@
           <a:lstStyle/>
           <a:p>
             <a:pPr algn="ctr"/>
+          </a:p>
+        </p:txBody>
+      </p:sp>
+      <p:sp>
+        <p:nvSpPr>
+          <p:cNvPr id="4" name="장식"/>
+          <p:cNvSpPr/>
+          <p:nvPr/>
+        </p:nvSpPr>
+        <p:spPr>
+          <a:xfrm>
+            <a:off x="5684367" y="1572768"/>
+            <a:ext cx="822960" cy="22860"/>
+          </a:xfrm>
+          <a:prstGeom prst="rect">
+            <a:avLst/>
+          </a:prstGeom>
+          <a:solidFill>
+            <a:srgbClr val="D8C579"/>
+          </a:solidFill>
+          <a:ln>
+            <a:noFill/>
+          </a:ln>
+        </p:spPr>
+        <p:txBody>
+          <a:bodyPr rtlCol="0" anchor="ctr"/>
+          <a:lstStyle/>
+          <a:p>
+            <a:pPr algn="ctr"/>
+          </a:p>
+        </p:txBody>
+      </p:sp>
+      <p:sp>
+        <p:nvSpPr>
+          <p:cNvPr id="5" name="상단 라벨"/>
+          <p:cNvSpPr txBox="1"/>
+          <p:nvPr/>
+        </p:nvSpPr>
+        <p:spPr>
+          <a:xfrm>
+            <a:off x="640080" y="182880"/>
+            <a:ext cx="3657600" cy="274320"/>
+          </a:xfrm>
+          <a:prstGeom prst="rect">
+            <a:avLst/>
+          </a:prstGeom>
+          <a:noFill/>
+        </p:spPr>
+        <p:txBody>
+          <a:bodyPr wrap="square" lIns="54864" rIns="54864" tIns="27432" bIns="27432" anchor="ctr">
+            <a:noAutofit/>
+          </a:bodyPr>
+          <a:lstStyle/>
+          <a:p>
+            <a:pPr algn="l">
+              <a:lnSpc>
+                <a:spcPct val="115000"/>
+              </a:lnSpc>
+            </a:pPr>
+            <a:r>
+              <a:rPr sz="800" b="1" i="0" spc="250">
+                <a:solidFill>
+                  <a:srgbClr val="8E8780"/>
+                </a:solidFill>
+              </a:rPr>
+              <a:t>FIRST BIRTHDAY</a:t>
+            </a:r>
           </a:p>
         </p:txBody>
       </p:sp>
@@ -6149,7 +6501,7 @@
         </p:nvSpPr>
         <p:spPr>
           <a:xfrm>
-            <a:off x="731520" y="548640"/>
+            <a:off x="1371600" y="640080"/>
             <a:ext cx="9448495" cy="868680"/>
           </a:xfrm>
         </p:spPr>
@@ -6159,7 +6511,7 @@
           </a:bodyPr>
           <a:lstStyle/>
           <a:p>
-            <a:pPr algn="l">
+            <a:pPr algn="ctr">
               <a:lnSpc>
                 <a:spcPct val="105000"/>
               </a:lnSpc>
@@ -6167,7 +6519,7 @@
             <a:r>
               <a:rPr sz="3000" b="1" i="0">
                 <a:solidFill>
-                  <a:srgbClr val="756110"/>
+                  <a:srgbClr val="26231F"/>
                 </a:solidFill>
               </a:rPr>
               <a:t>사진 모음</a:t>
@@ -6177,14 +6529,14 @@
       </p:sp>
       <p:sp>
         <p:nvSpPr>
-          <p:cNvPr id="4" name="사진 자리"/>
+          <p:cNvPr id="6" name="사진 자리"/>
           <p:cNvSpPr/>
           <p:nvPr/>
         </p:nvSpPr>
         <p:spPr>
           <a:xfrm>
-            <a:off x="731520" y="1600200"/>
-            <a:ext cx="2545003" cy="2217420"/>
+            <a:off x="640080" y="1783080"/>
+            <a:ext cx="2590723" cy="2194560"/>
           </a:xfrm>
           <a:prstGeom prst="roundRect">
             <a:avLst>
@@ -6192,12 +6544,10 @@
             </a:avLst>
           </a:prstGeom>
           <a:solidFill>
-            <a:srgbClr val="F9EFC8"/>
+            <a:srgbClr val="F6EFD5"/>
           </a:solidFill>
           <a:ln w="19050">
-            <a:solidFill>
-              <a:srgbClr val="CEAB1C"/>
-            </a:solidFill>
+            <a:noFill/>
             <a:prstDash val="dash"/>
           </a:ln>
         </p:spPr>
@@ -6215,7 +6565,7 @@
             <a:r>
               <a:rPr sz="1200" b="0" i="0">
                 <a:solidFill>
-                  <a:srgbClr val="756110"/>
+                  <a:srgbClr val="8E8780"/>
                 </a:solidFill>
               </a:rPr>
               <a:t>사진 1</a:t>
@@ -6225,14 +6575,14 @@
       </p:sp>
       <p:sp>
         <p:nvSpPr>
-          <p:cNvPr id="5" name="사진 자리"/>
+          <p:cNvPr id="7" name="사진 자리"/>
           <p:cNvSpPr/>
           <p:nvPr/>
         </p:nvSpPr>
         <p:spPr>
           <a:xfrm>
-            <a:off x="3459403" y="1600200"/>
-            <a:ext cx="2545003" cy="2217420"/>
+            <a:off x="3413683" y="1783080"/>
+            <a:ext cx="2590723" cy="2194560"/>
           </a:xfrm>
           <a:prstGeom prst="roundRect">
             <a:avLst>
@@ -6240,12 +6590,10 @@
             </a:avLst>
           </a:prstGeom>
           <a:solidFill>
-            <a:srgbClr val="F9EFC8"/>
+            <a:srgbClr val="F6EFD5"/>
           </a:solidFill>
           <a:ln w="19050">
-            <a:solidFill>
-              <a:srgbClr val="CEAB1C"/>
-            </a:solidFill>
+            <a:noFill/>
             <a:prstDash val="dash"/>
           </a:ln>
         </p:spPr>
@@ -6263,7 +6611,7 @@
             <a:r>
               <a:rPr sz="1200" b="0" i="0">
                 <a:solidFill>
-                  <a:srgbClr val="756110"/>
+                  <a:srgbClr val="8E8780"/>
                 </a:solidFill>
               </a:rPr>
               <a:t>사진 2</a:t>
@@ -6273,14 +6621,14 @@
       </p:sp>
       <p:sp>
         <p:nvSpPr>
-          <p:cNvPr id="6" name="사진 자리"/>
+          <p:cNvPr id="8" name="사진 자리"/>
           <p:cNvSpPr/>
           <p:nvPr/>
         </p:nvSpPr>
         <p:spPr>
           <a:xfrm>
-            <a:off x="6187287" y="1600200"/>
-            <a:ext cx="2545003" cy="2217420"/>
+            <a:off x="6187287" y="1783080"/>
+            <a:ext cx="2590723" cy="2194560"/>
           </a:xfrm>
           <a:prstGeom prst="roundRect">
             <a:avLst>
@@ -6288,12 +6636,10 @@
             </a:avLst>
           </a:prstGeom>
           <a:solidFill>
-            <a:srgbClr val="F9EFC8"/>
+            <a:srgbClr val="F6EFD5"/>
           </a:solidFill>
           <a:ln w="19050">
-            <a:solidFill>
-              <a:srgbClr val="CEAB1C"/>
-            </a:solidFill>
+            <a:noFill/>
             <a:prstDash val="dash"/>
           </a:ln>
         </p:spPr>
@@ -6311,7 +6657,7 @@
             <a:r>
               <a:rPr sz="1200" b="0" i="0">
                 <a:solidFill>
-                  <a:srgbClr val="756110"/>
+                  <a:srgbClr val="8E8780"/>
                 </a:solidFill>
               </a:rPr>
               <a:t>사진 3</a:t>
@@ -6321,14 +6667,14 @@
       </p:sp>
       <p:sp>
         <p:nvSpPr>
-          <p:cNvPr id="7" name="사진 자리"/>
+          <p:cNvPr id="9" name="사진 자리"/>
           <p:cNvSpPr/>
           <p:nvPr/>
         </p:nvSpPr>
         <p:spPr>
           <a:xfrm>
-            <a:off x="8915171" y="1600200"/>
-            <a:ext cx="2545003" cy="2217420"/>
+            <a:off x="8960891" y="1783080"/>
+            <a:ext cx="2590723" cy="2194560"/>
           </a:xfrm>
           <a:prstGeom prst="roundRect">
             <a:avLst>
@@ -6336,12 +6682,10 @@
             </a:avLst>
           </a:prstGeom>
           <a:solidFill>
-            <a:srgbClr val="F9EFC8"/>
+            <a:srgbClr val="F6EFD5"/>
           </a:solidFill>
           <a:ln w="19050">
-            <a:solidFill>
-              <a:srgbClr val="CEAB1C"/>
-            </a:solidFill>
+            <a:noFill/>
             <a:prstDash val="dash"/>
           </a:ln>
         </p:spPr>
@@ -6359,7 +6703,7 @@
             <a:r>
               <a:rPr sz="1200" b="0" i="0">
                 <a:solidFill>
-                  <a:srgbClr val="756110"/>
+                  <a:srgbClr val="8E8780"/>
                 </a:solidFill>
               </a:rPr>
               <a:t>사진 4</a:t>
@@ -6369,14 +6713,14 @@
       </p:sp>
       <p:sp>
         <p:nvSpPr>
-          <p:cNvPr id="8" name="사진 자리"/>
+          <p:cNvPr id="10" name="사진 자리"/>
           <p:cNvSpPr/>
           <p:nvPr/>
         </p:nvSpPr>
         <p:spPr>
           <a:xfrm>
-            <a:off x="731520" y="4000500"/>
-            <a:ext cx="2545003" cy="2217420"/>
+            <a:off x="640080" y="4160520"/>
+            <a:ext cx="2590723" cy="2194560"/>
           </a:xfrm>
           <a:prstGeom prst="roundRect">
             <a:avLst>
@@ -6384,12 +6728,10 @@
             </a:avLst>
           </a:prstGeom>
           <a:solidFill>
-            <a:srgbClr val="F9EFC8"/>
+            <a:srgbClr val="F6EFD5"/>
           </a:solidFill>
           <a:ln w="19050">
-            <a:solidFill>
-              <a:srgbClr val="CEAB1C"/>
-            </a:solidFill>
+            <a:noFill/>
             <a:prstDash val="dash"/>
           </a:ln>
         </p:spPr>
@@ -6407,7 +6749,7 @@
             <a:r>
               <a:rPr sz="1200" b="0" i="0">
                 <a:solidFill>
-                  <a:srgbClr val="756110"/>
+                  <a:srgbClr val="8E8780"/>
                 </a:solidFill>
               </a:rPr>
               <a:t>사진 5</a:t>
@@ -6417,14 +6759,14 @@
       </p:sp>
       <p:sp>
         <p:nvSpPr>
-          <p:cNvPr id="9" name="사진 자리"/>
+          <p:cNvPr id="11" name="사진 자리"/>
           <p:cNvSpPr/>
           <p:nvPr/>
         </p:nvSpPr>
         <p:spPr>
           <a:xfrm>
-            <a:off x="3459403" y="4000500"/>
-            <a:ext cx="2545003" cy="2217420"/>
+            <a:off x="3413683" y="4160520"/>
+            <a:ext cx="2590723" cy="2194560"/>
           </a:xfrm>
           <a:prstGeom prst="roundRect">
             <a:avLst>
@@ -6432,12 +6774,10 @@
             </a:avLst>
           </a:prstGeom>
           <a:solidFill>
-            <a:srgbClr val="F9EFC8"/>
+            <a:srgbClr val="F6EFD5"/>
           </a:solidFill>
           <a:ln w="19050">
-            <a:solidFill>
-              <a:srgbClr val="CEAB1C"/>
-            </a:solidFill>
+            <a:noFill/>
             <a:prstDash val="dash"/>
           </a:ln>
         </p:spPr>
@@ -6455,7 +6795,7 @@
             <a:r>
               <a:rPr sz="1200" b="0" i="0">
                 <a:solidFill>
-                  <a:srgbClr val="756110"/>
+                  <a:srgbClr val="8E8780"/>
                 </a:solidFill>
               </a:rPr>
               <a:t>사진 6</a:t>
@@ -6465,14 +6805,14 @@
       </p:sp>
       <p:sp>
         <p:nvSpPr>
-          <p:cNvPr id="10" name="사진 자리"/>
+          <p:cNvPr id="12" name="사진 자리"/>
           <p:cNvSpPr/>
           <p:nvPr/>
         </p:nvSpPr>
         <p:spPr>
           <a:xfrm>
-            <a:off x="6187287" y="4000500"/>
-            <a:ext cx="2545003" cy="2217420"/>
+            <a:off x="6187287" y="4160520"/>
+            <a:ext cx="2590723" cy="2194560"/>
           </a:xfrm>
           <a:prstGeom prst="roundRect">
             <a:avLst>
@@ -6480,12 +6820,10 @@
             </a:avLst>
           </a:prstGeom>
           <a:solidFill>
-            <a:srgbClr val="F9EFC8"/>
+            <a:srgbClr val="F6EFD5"/>
           </a:solidFill>
           <a:ln w="19050">
-            <a:solidFill>
-              <a:srgbClr val="CEAB1C"/>
-            </a:solidFill>
+            <a:noFill/>
             <a:prstDash val="dash"/>
           </a:ln>
         </p:spPr>
@@ -6503,7 +6841,7 @@
             <a:r>
               <a:rPr sz="1200" b="0" i="0">
                 <a:solidFill>
-                  <a:srgbClr val="756110"/>
+                  <a:srgbClr val="8E8780"/>
                 </a:solidFill>
               </a:rPr>
               <a:t>사진 7</a:t>
@@ -6513,14 +6851,14 @@
       </p:sp>
       <p:sp>
         <p:nvSpPr>
-          <p:cNvPr id="11" name="사진 자리"/>
+          <p:cNvPr id="13" name="사진 자리"/>
           <p:cNvSpPr/>
           <p:nvPr/>
         </p:nvSpPr>
         <p:spPr>
           <a:xfrm>
-            <a:off x="8915171" y="4000500"/>
-            <a:ext cx="2545003" cy="2217420"/>
+            <a:off x="8960891" y="4160520"/>
+            <a:ext cx="2590723" cy="2194560"/>
           </a:xfrm>
           <a:prstGeom prst="roundRect">
             <a:avLst>
@@ -6528,12 +6866,10 @@
             </a:avLst>
           </a:prstGeom>
           <a:solidFill>
-            <a:srgbClr val="F9EFC8"/>
+            <a:srgbClr val="F6EFD5"/>
           </a:solidFill>
           <a:ln w="19050">
-            <a:solidFill>
-              <a:srgbClr val="CEAB1C"/>
-            </a:solidFill>
+            <a:noFill/>
             <a:prstDash val="dash"/>
           </a:ln>
         </p:spPr>
@@ -6551,7 +6887,7 @@
             <a:r>
               <a:rPr sz="1200" b="0" i="0">
                 <a:solidFill>
-                  <a:srgbClr val="756110"/>
+                  <a:srgbClr val="8E8780"/>
                 </a:solidFill>
               </a:rPr>
               <a:t>사진 8</a:t>
@@ -6570,6 +6906,14 @@
 <file path=ppt/slides/slide6.xml><?xml version="1.0" encoding="utf-8"?>
 <p:sld xmlns:a="http://schemas.openxmlformats.org/drawingml/2006/main" xmlns:p="http://schemas.openxmlformats.org/presentationml/2006/main" xmlns:r="http://schemas.openxmlformats.org/officeDocument/2006/relationships">
   <p:cSld>
+    <p:bg>
+      <p:bgPr>
+        <a:solidFill>
+          <a:srgbClr val="FBF8EC"/>
+        </a:solidFill>
+        <a:effectLst/>
+      </p:bgPr>
+    </p:bg>
     <p:spTree>
       <p:nvGrpSpPr>
         <p:cNvPr id="1" name=""/>
@@ -6577,30 +6921,116 @@
         <p:nvPr/>
       </p:nvGrpSpPr>
       <p:grpSpPr/>
-      <p:pic>
-        <p:nvPicPr>
-          <p:cNvPr id="3" name="표지 그림" descr="birthday-31.jpg"/>
-          <p:cNvPicPr>
-            <a:picLocks noChangeAspect="1"/>
-          </p:cNvPicPr>
+      <p:sp>
+        <p:nvSpPr>
+          <p:cNvPr id="3" name="사진 자리"/>
+          <p:cNvSpPr/>
           <p:nvPr/>
-        </p:nvPicPr>
-        <p:blipFill>
-          <a:blip r:embed="rId2"/>
-          <a:stretch>
-            <a:fillRect/>
-          </a:stretch>
-        </p:blipFill>
+        </p:nvSpPr>
         <p:spPr>
           <a:xfrm>
             <a:off x="0" y="0"/>
-            <a:ext cx="12191695" cy="6858000"/>
+            <a:ext cx="4389010" cy="6858000"/>
           </a:xfrm>
           <a:prstGeom prst="rect">
             <a:avLst/>
           </a:prstGeom>
-        </p:spPr>
-      </p:pic>
+          <a:solidFill>
+            <a:srgbClr val="EBDEAD"/>
+          </a:solidFill>
+          <a:ln>
+            <a:noFill/>
+          </a:ln>
+        </p:spPr>
+        <p:txBody>
+          <a:bodyPr rtlCol="0" anchor="ctr" wrap="square" lIns="54864" rIns="54864" tIns="27432" bIns="27432">
+            <a:noAutofit/>
+          </a:bodyPr>
+          <a:lstStyle/>
+          <a:p>
+            <a:pPr algn="ctr">
+              <a:lnSpc>
+                <a:spcPct val="100000"/>
+              </a:lnSpc>
+            </a:pPr>
+            <a:r>
+              <a:rPr sz="1400" b="0" i="0">
+                <a:solidFill>
+                  <a:srgbClr val="494227"/>
+                </a:solidFill>
+              </a:rPr>
+              <a:t>사진을 넣어 주세요</a:t>
+            </a:r>
+          </a:p>
+        </p:txBody>
+      </p:sp>
+      <p:sp>
+        <p:nvSpPr>
+          <p:cNvPr id="4" name="장식"/>
+          <p:cNvSpPr/>
+          <p:nvPr/>
+        </p:nvSpPr>
+        <p:spPr>
+          <a:xfrm>
+            <a:off x="365750" y="365760"/>
+            <a:ext cx="3657508" cy="6126480"/>
+          </a:xfrm>
+          <a:prstGeom prst="rect">
+            <a:avLst/>
+          </a:prstGeom>
+          <a:noFill/>
+          <a:ln w="9525">
+            <a:solidFill>
+              <a:srgbClr val="26231F"/>
+            </a:solidFill>
+          </a:ln>
+        </p:spPr>
+        <p:txBody>
+          <a:bodyPr rtlCol="0" anchor="ctr"/>
+          <a:lstStyle/>
+          <a:p>
+            <a:pPr algn="ctr"/>
+          </a:p>
+        </p:txBody>
+      </p:sp>
+      <p:sp>
+        <p:nvSpPr>
+          <p:cNvPr id="5" name="라벨"/>
+          <p:cNvSpPr txBox="1"/>
+          <p:nvPr/>
+        </p:nvSpPr>
+        <p:spPr>
+          <a:xfrm>
+            <a:off x="6827349" y="2148840"/>
+            <a:ext cx="4632844" cy="274320"/>
+          </a:xfrm>
+          <a:prstGeom prst="rect">
+            <a:avLst/>
+          </a:prstGeom>
+          <a:noFill/>
+        </p:spPr>
+        <p:txBody>
+          <a:bodyPr wrap="square" lIns="54864" rIns="54864" tIns="27432" bIns="27432" anchor="t">
+            <a:noAutofit/>
+          </a:bodyPr>
+          <a:lstStyle/>
+          <a:p>
+            <a:pPr algn="l">
+              <a:lnSpc>
+                <a:spcPct val="115000"/>
+              </a:lnSpc>
+            </a:pPr>
+            <a:r>
+              <a:rPr sz="1000" b="1" i="0" spc="250">
+                <a:solidFill>
+                  <a:srgbClr val="26231F"/>
+                </a:solidFill>
+              </a:rPr>
+              <a:t>FIRST BIRTHDAY</a:t>
+            </a:r>
+          </a:p>
+        </p:txBody>
+      </p:sp>
       <p:sp>
         <p:nvSpPr>
           <p:cNvPr id="2" name="Title 1"/>
@@ -6613,8 +7043,8 @@
         </p:nvSpPr>
         <p:spPr>
           <a:xfrm>
-            <a:off x="853418" y="2057400"/>
-            <a:ext cx="6095847" cy="1554480"/>
+            <a:off x="6827349" y="2606040"/>
+            <a:ext cx="4632844" cy="1188720"/>
           </a:xfrm>
         </p:spPr>
         <p:txBody>
@@ -6631,7 +7061,7 @@
             <a:r>
               <a:rPr sz="3400" b="1" i="0">
                 <a:solidFill>
-                  <a:srgbClr val="756110"/>
+                  <a:srgbClr val="26231F"/>
                 </a:solidFill>
               </a:rPr>
               <a:t>와 주셔서 고맙습니다</a:t>
@@ -6641,14 +7071,14 @@
       </p:sp>
       <p:sp>
         <p:nvSpPr>
-          <p:cNvPr id="4" name="한 줄 문구"/>
+          <p:cNvPr id="6" name="한 줄 문구"/>
           <p:cNvSpPr txBox="1"/>
           <p:nvPr/>
         </p:nvSpPr>
         <p:spPr>
           <a:xfrm>
-            <a:off x="853418" y="3749039"/>
-            <a:ext cx="6095847" cy="822960"/>
+            <a:off x="6827349" y="3886200"/>
+            <a:ext cx="4632844" cy="822960"/>
           </a:xfrm>
           <a:prstGeom prst="rect">
             <a:avLst/>
@@ -6667,9 +7097,9 @@
               </a:lnSpc>
             </a:pPr>
             <a:r>
-              <a:rPr sz="1700" b="0" i="1">
+              <a:rPr sz="1700" b="0" i="0">
                 <a:solidFill>
-                  <a:srgbClr val="756110"/>
+                  <a:srgbClr val="26231F"/>
                 </a:solidFill>
               </a:rPr>
               <a:t>아이가 한 살이 되었습니다</a:t>
@@ -6679,14 +7109,14 @@
       </p:sp>
       <p:sp>
         <p:nvSpPr>
-          <p:cNvPr id="5" name="안내 문구"/>
+          <p:cNvPr id="7" name="안내 문구"/>
           <p:cNvSpPr txBox="1"/>
           <p:nvPr/>
         </p:nvSpPr>
         <p:spPr>
           <a:xfrm>
-            <a:off x="853418" y="4617720"/>
-            <a:ext cx="6095847" cy="914400"/>
+            <a:off x="6827349" y="4754880"/>
+            <a:ext cx="4632844" cy="914400"/>
           </a:xfrm>
           <a:prstGeom prst="rect">
             <a:avLst/>
@@ -6707,7 +7137,7 @@
             <a:r>
               <a:rPr sz="1400" b="0" i="0">
                 <a:solidFill>
-                  <a:srgbClr val="666666"/>
+                  <a:srgbClr val="26231F"/>
                 </a:solidFill>
               </a:rPr>
               <a:t>아기 이름 · 부모 이름</a:t>
@@ -6734,34 +7164,34 @@
         <a:sysClr val="window" lastClr="FFFFFF"/>
       </a:lt1>
       <a:dk2>
-        <a:srgbClr val="756110"/>
+        <a:srgbClr val="494227"/>
       </a:dk2>
       <a:lt2>
-        <a:srgbClr val="FDF9ED"/>
+        <a:srgbClr val="FBF8EC"/>
       </a:lt2>
       <a:accent1>
-        <a:srgbClr val="CEAB1C"/>
+        <a:srgbClr val="D8C579"/>
       </a:accent1>
       <a:accent2>
-        <a:srgbClr val="3B7791"/>
+        <a:srgbClr val="CEE198"/>
       </a:accent2>
       <a:accent3>
-        <a:srgbClr val="756110"/>
+        <a:srgbClr val="494227"/>
       </a:accent3>
       <a:accent4>
-        <a:srgbClr val="F9EFC8"/>
+        <a:srgbClr val="F6EFD5"/>
       </a:accent4>
       <a:accent5>
-        <a:srgbClr val="849156"/>
+        <a:srgbClr val="D3D388"/>
       </a:accent5>
       <a:accent6>
-        <a:srgbClr val="ACA070"/>
+        <a:srgbClr val="928E7D"/>
       </a:accent6>
       <a:hlink>
-        <a:srgbClr val="CEAB1C"/>
+        <a:srgbClr val="D8C579"/>
       </a:hlink>
       <a:folHlink>
-        <a:srgbClr val="756110"/>
+        <a:srgbClr val="494227"/>
       </a:folHlink>
     </a:clrScheme>
     <a:fontScheme name="Office">
